--- a/docs/strategy/diary/manufacturer-brief/02_concept_deck.pptx
+++ b/docs/strategy/diary/manufacturer-brief/02_concept_deck.pptx
@@ -3112,7 +3112,7 @@
         <p:spPr>
           <a:xfrm>
             <a:off x="0" y="0"/>
-            <a:ext cx="12191695" cy="365760"/>
+            <a:ext cx="12191695" cy="6858000"/>
           </a:xfrm>
           <a:prstGeom prst="rect">
             <a:avLst/>
@@ -3155,8 +3155,8 @@
         </p:nvSpPr>
         <p:spPr>
           <a:xfrm>
-            <a:off x="0" y="6675120"/>
-            <a:ext cx="12191695" cy="182880"/>
+            <a:off x="731520" y="548640"/>
+            <a:ext cx="10515600" cy="22860"/>
           </a:xfrm>
           <a:prstGeom prst="rect">
             <a:avLst/>
@@ -3193,14 +3193,104 @@
       </p:sp>
       <p:sp>
         <p:nvSpPr>
-          <p:cNvPr id="4" name="TextBox 3"/>
+          <p:cNvPr id="4" name="Rectangle 3"/>
+          <p:cNvSpPr/>
+          <p:nvPr/>
+        </p:nvSpPr>
+        <p:spPr>
+          <a:xfrm>
+            <a:off x="731520" y="6309360"/>
+            <a:ext cx="10515600" cy="22860"/>
+          </a:xfrm>
+          <a:prstGeom prst="rect">
+            <a:avLst/>
+          </a:prstGeom>
+          <a:solidFill>
+            <a:srgbClr val="C9A04F"/>
+          </a:solidFill>
+          <a:ln>
+            <a:noFill/>
+          </a:ln>
+          <a:effectLst/>
+        </p:spPr>
+        <p:style>
+          <a:lnRef idx="1">
+            <a:schemeClr val="accent1"/>
+          </a:lnRef>
+          <a:fillRef idx="3">
+            <a:schemeClr val="accent1"/>
+          </a:fillRef>
+          <a:effectRef idx="2">
+            <a:schemeClr val="accent1"/>
+          </a:effectRef>
+          <a:fontRef idx="minor">
+            <a:schemeClr val="lt1"/>
+          </a:fontRef>
+        </p:style>
+        <p:txBody>
+          <a:bodyPr rtlCol="0" anchor="ctr"/>
+          <a:lstStyle/>
+          <a:p>
+            <a:pPr algn="ctr"/>
+          </a:p>
+        </p:txBody>
+      </p:sp>
+      <p:sp>
+        <p:nvSpPr>
+          <p:cNvPr id="5" name="Rectangle 4"/>
+          <p:cNvSpPr/>
+          <p:nvPr/>
+        </p:nvSpPr>
+        <p:spPr>
+          <a:xfrm>
+            <a:off x="5440680" y="1554480"/>
+            <a:ext cx="1280160" cy="1280160"/>
+          </a:xfrm>
+          <a:prstGeom prst="rect">
+            <a:avLst/>
+          </a:prstGeom>
+          <a:solidFill>
+            <a:srgbClr val="1A2B4A"/>
+          </a:solidFill>
+          <a:ln w="9525">
+            <a:solidFill>
+              <a:srgbClr val="C9A04F"/>
+            </a:solidFill>
+          </a:ln>
+          <a:effectLst/>
+        </p:spPr>
+        <p:style>
+          <a:lnRef idx="1">
+            <a:schemeClr val="accent1"/>
+          </a:lnRef>
+          <a:fillRef idx="3">
+            <a:schemeClr val="accent1"/>
+          </a:fillRef>
+          <a:effectRef idx="2">
+            <a:schemeClr val="accent1"/>
+          </a:effectRef>
+          <a:fontRef idx="minor">
+            <a:schemeClr val="lt1"/>
+          </a:fontRef>
+        </p:style>
+        <p:txBody>
+          <a:bodyPr rtlCol="0" anchor="ctr"/>
+          <a:lstStyle/>
+          <a:p>
+            <a:pPr algn="ctr"/>
+          </a:p>
+        </p:txBody>
+      </p:sp>
+      <p:sp>
+        <p:nvSpPr>
+          <p:cNvPr id="6" name="TextBox 5"/>
           <p:cNvSpPr txBox="1"/>
           <p:nvPr/>
         </p:nvSpPr>
         <p:spPr>
           <a:xfrm>
-            <a:off x="731520" y="1097280"/>
-            <a:ext cx="10972800" cy="365760"/>
+            <a:off x="5440680" y="1691640"/>
+            <a:ext cx="1280160" cy="1005840"/>
           </a:xfrm>
           <a:prstGeom prst="rect">
             <a:avLst/>
@@ -3213,34 +3303,34 @@
           </a:bodyPr>
           <a:lstStyle/>
           <a:p>
-            <a:pPr algn="l">
+            <a:pPr algn="ctr">
               <a:lnSpc>
                 <a:spcPct val="130000"/>
               </a:lnSpc>
             </a:pPr>
             <a:r>
-              <a:rPr sz="1100" b="1">
+              <a:rPr sz="5400" b="1">
                 <a:solidFill>
                   <a:srgbClr val="C9A04F"/>
                 </a:solidFill>
                 <a:latin typeface="Noto Sans CJK KR"/>
                 <a:ea typeface="Noto Sans CJK KR"/>
               </a:rPr>
-              <a:t>LIFE PORTFOLIO · 인생포트폴리오</a:t>
-            </a:r>
-          </a:p>
-        </p:txBody>
-      </p:sp>
-      <p:sp>
-        <p:nvSpPr>
-          <p:cNvPr id="5" name="TextBox 4"/>
+              <a:t>L</a:t>
+            </a:r>
+          </a:p>
+        </p:txBody>
+      </p:sp>
+      <p:sp>
+        <p:nvSpPr>
+          <p:cNvPr id="7" name="TextBox 6"/>
           <p:cNvSpPr txBox="1"/>
           <p:nvPr/>
         </p:nvSpPr>
         <p:spPr>
           <a:xfrm>
-            <a:off x="731520" y="1828800"/>
-            <a:ext cx="10972800" cy="1371600"/>
+            <a:off x="731520" y="3108960"/>
+            <a:ext cx="10515600" cy="457200"/>
           </a:xfrm>
           <a:prstGeom prst="rect">
             <a:avLst/>
@@ -3253,34 +3343,34 @@
           </a:bodyPr>
           <a:lstStyle/>
           <a:p>
-            <a:pPr algn="l">
+            <a:pPr algn="ctr">
               <a:lnSpc>
                 <a:spcPct val="130000"/>
               </a:lnSpc>
             </a:pPr>
             <a:r>
-              <a:rPr sz="4800" b="1">
-                <a:solidFill>
-                  <a:srgbClr val="1A2B4A"/>
-                </a:solidFill>
-                <a:latin typeface="Noto Sans CJK KR"/>
-                <a:ea typeface="Noto Sans CJK KR"/>
-              </a:rPr>
-              <a:t>인생포트폴리오 커스텀 다이어리</a:t>
-            </a:r>
-          </a:p>
-        </p:txBody>
-      </p:sp>
-      <p:sp>
-        <p:nvSpPr>
-          <p:cNvPr id="6" name="TextBox 5"/>
+              <a:rPr sz="1800" b="1">
+                <a:solidFill>
+                  <a:srgbClr val="C9A04F"/>
+                </a:solidFill>
+                <a:latin typeface="Noto Sans CJK KR"/>
+                <a:ea typeface="Noto Sans CJK KR"/>
+              </a:rPr>
+              <a:t>LIFE · PORTFOLIO</a:t>
+            </a:r>
+          </a:p>
+        </p:txBody>
+      </p:sp>
+      <p:sp>
+        <p:nvSpPr>
+          <p:cNvPr id="8" name="TextBox 7"/>
           <p:cNvSpPr txBox="1"/>
           <p:nvPr/>
         </p:nvSpPr>
         <p:spPr>
           <a:xfrm>
-            <a:off x="731520" y="3108960"/>
-            <a:ext cx="10972800" cy="548640"/>
+            <a:off x="731520" y="3703320"/>
+            <a:ext cx="10515600" cy="914400"/>
           </a:xfrm>
           <a:prstGeom prst="rect">
             <a:avLst/>
@@ -3293,34 +3383,34 @@
           </a:bodyPr>
           <a:lstStyle/>
           <a:p>
-            <a:pPr algn="l">
+            <a:pPr algn="ctr">
               <a:lnSpc>
                 <a:spcPct val="130000"/>
               </a:lnSpc>
             </a:pPr>
             <a:r>
-              <a:rPr sz="2000" b="0">
-                <a:solidFill>
-                  <a:srgbClr val="374151"/>
-                </a:solidFill>
-                <a:latin typeface="Noto Sans CJK KR"/>
-                <a:ea typeface="Noto Sans CJK KR"/>
-              </a:rPr>
-              <a:t>제작 시안 · 디자인 컨셉 &amp; 생산 사양 제안</a:t>
-            </a:r>
-          </a:p>
-        </p:txBody>
-      </p:sp>
-      <p:sp>
-        <p:nvSpPr>
-          <p:cNvPr id="7" name="Rectangle 6"/>
-          <p:cNvSpPr/>
-          <p:nvPr/>
-        </p:nvSpPr>
-        <p:spPr>
-          <a:xfrm>
-            <a:off x="731520" y="3931920"/>
-            <a:ext cx="2286000" cy="36576"/>
+              <a:rPr sz="5400" b="1">
+                <a:solidFill>
+                  <a:srgbClr val="FEF7E6"/>
+                </a:solidFill>
+                <a:latin typeface="Noto Sans CJK KR"/>
+                <a:ea typeface="Noto Sans CJK KR"/>
+              </a:rPr>
+              <a:t>인생포트폴리오</a:t>
+            </a:r>
+          </a:p>
+        </p:txBody>
+      </p:sp>
+      <p:sp>
+        <p:nvSpPr>
+          <p:cNvPr id="9" name="Rectangle 8"/>
+          <p:cNvSpPr/>
+          <p:nvPr/>
+        </p:nvSpPr>
+        <p:spPr>
+          <a:xfrm>
+            <a:off x="5623560" y="4892040"/>
+            <a:ext cx="914400" cy="22860"/>
           </a:xfrm>
           <a:prstGeom prst="rect">
             <a:avLst/>
@@ -3357,14 +3447,14 @@
       </p:sp>
       <p:sp>
         <p:nvSpPr>
-          <p:cNvPr id="8" name="TextBox 7"/>
+          <p:cNvPr id="10" name="TextBox 9"/>
           <p:cNvSpPr txBox="1"/>
           <p:nvPr/>
         </p:nvSpPr>
         <p:spPr>
           <a:xfrm>
-            <a:off x="731520" y="4206240"/>
-            <a:ext cx="10972800" cy="1828800"/>
+            <a:off x="731520" y="5074920"/>
+            <a:ext cx="10515600" cy="548640"/>
           </a:xfrm>
           <a:prstGeom prst="rect">
             <a:avLst/>
@@ -3377,145 +3467,20 @@
           </a:bodyPr>
           <a:lstStyle/>
           <a:p>
-            <a:pPr algn="l">
-              <a:lnSpc>
-                <a:spcPct val="170000"/>
-              </a:lnSpc>
-            </a:pPr>
-            <a:r>
-              <a:rPr sz="1200" b="0">
-                <a:solidFill>
-                  <a:srgbClr val="374151"/>
-                </a:solidFill>
-                <a:latin typeface="Noto Sans CJK KR"/>
-                <a:ea typeface="Noto Sans CJK KR"/>
-              </a:rPr>
-              <a:t>발주처     인생포트폴리오 / Life Portfolio</a:t>
-            </a:r>
-          </a:p>
-          <a:p>
-            <a:pPr algn="l">
-              <a:lnSpc>
-                <a:spcPct val="170000"/>
-              </a:lnSpc>
-            </a:pPr>
-            <a:r>
-              <a:rPr sz="1200" b="0">
-                <a:solidFill>
-                  <a:srgbClr val="374151"/>
-                </a:solidFill>
-                <a:latin typeface="Noto Sans CJK KR"/>
-                <a:ea typeface="Noto Sans CJK KR"/>
-              </a:rPr>
-              <a:t>제품명     인생포트폴리오 커스텀 다이어리(가칭)</a:t>
-            </a:r>
-          </a:p>
-          <a:p>
-            <a:pPr algn="l">
-              <a:lnSpc>
-                <a:spcPct val="170000"/>
-              </a:lnSpc>
-            </a:pPr>
-            <a:r>
-              <a:rPr sz="1200" b="0">
-                <a:solidFill>
-                  <a:srgbClr val="374151"/>
-                </a:solidFill>
-                <a:latin typeface="Noto Sans CJK KR"/>
-                <a:ea typeface="Noto Sans CJK KR"/>
-              </a:rPr>
-              <a:t>규격       A5(148×210mm) · 양장 사철 · 약 232p (단일 시나리오)</a:t>
-            </a:r>
-          </a:p>
-          <a:p>
-            <a:pPr algn="l">
-              <a:lnSpc>
-                <a:spcPct val="170000"/>
-              </a:lnSpc>
-            </a:pPr>
-            <a:r>
-              <a:rPr sz="1200" b="0">
-                <a:solidFill>
-                  <a:srgbClr val="374151"/>
-                </a:solidFill>
-                <a:latin typeface="Noto Sans CJK KR"/>
-                <a:ea typeface="Noto Sans CJK KR"/>
-              </a:rPr>
-              <a:t>종이       만년필 친화 70g (도모에리버 대체재)</a:t>
-            </a:r>
-          </a:p>
-          <a:p>
-            <a:pPr algn="l">
-              <a:lnSpc>
-                <a:spcPct val="170000"/>
-              </a:lnSpc>
-            </a:pPr>
-            <a:r>
-              <a:rPr sz="1200" b="0">
-                <a:solidFill>
-                  <a:srgbClr val="374151"/>
-                </a:solidFill>
-                <a:latin typeface="Noto Sans CJK KR"/>
-                <a:ea typeface="Noto Sans CJK KR"/>
-              </a:rPr>
-              <a:t>수량       500부 1차 발주</a:t>
-            </a:r>
-          </a:p>
-          <a:p>
-            <a:pPr algn="l">
-              <a:lnSpc>
-                <a:spcPct val="170000"/>
-              </a:lnSpc>
-            </a:pPr>
-            <a:r>
-              <a:rPr sz="1200" b="0">
-                <a:solidFill>
-                  <a:srgbClr val="374151"/>
-                </a:solidFill>
-                <a:latin typeface="Noto Sans CJK KR"/>
-                <a:ea typeface="Noto Sans CJK KR"/>
-              </a:rPr>
-              <a:t>대상       우일 · 북토리 · 이든프린팅 3사</a:t>
-            </a:r>
-          </a:p>
-        </p:txBody>
-      </p:sp>
-      <p:sp>
-        <p:nvSpPr>
-          <p:cNvPr id="9" name="TextBox 8"/>
-          <p:cNvSpPr txBox="1"/>
-          <p:nvPr/>
-        </p:nvSpPr>
-        <p:spPr>
-          <a:xfrm>
-            <a:off x="8686800" y="6035040"/>
-            <a:ext cx="2926080" cy="274320"/>
-          </a:xfrm>
-          <a:prstGeom prst="rect">
-            <a:avLst/>
-          </a:prstGeom>
-          <a:noFill/>
-        </p:spPr>
-        <p:txBody>
-          <a:bodyPr wrap="square" lIns="0" rIns="0" tIns="0" bIns="0" anchor="t">
-            <a:spAutoFit/>
-          </a:bodyPr>
-          <a:lstStyle/>
-          <a:p>
-            <a:pPr algn="r">
+            <a:pPr algn="ctr">
               <a:lnSpc>
                 <a:spcPct val="130000"/>
               </a:lnSpc>
             </a:pPr>
             <a:r>
-              <a:rPr sz="1000" b="0">
-                <a:solidFill>
-                  <a:srgbClr val="6B7280"/>
-                </a:solidFill>
-                <a:latin typeface="Noto Sans CJK KR"/>
-                <a:ea typeface="Noto Sans CJK KR"/>
-              </a:rPr>
-              <a:t>Manufacturer Brief · v1.1 · 2026-05-20</a:t>
+              <a:rPr sz="2600" b="0">
+                <a:solidFill>
+                  <a:srgbClr val="C9A04F"/>
+                </a:solidFill>
+                <a:latin typeface="Noto Sans CJK KR"/>
+                <a:ea typeface="Noto Sans CJK KR"/>
+              </a:rPr>
+              <a:t>Only One</a:t>
             </a:r>
           </a:p>
         </p:txBody>
@@ -4532,7 +4497,7 @@
                 <a:latin typeface="Noto Sans CJK KR"/>
                 <a:ea typeface="Noto Sans CJK KR"/>
               </a:rPr>
-              <a:t>Life Portfolio · 인생포트폴리오 커스텀 다이어리</a:t>
+              <a:t>Life Portfolio · 인생포트폴리오 맞춤형 다이어리</a:t>
             </a:r>
           </a:p>
         </p:txBody>
@@ -12732,7 +12697,7 @@
                 <a:latin typeface="Noto Sans CJK KR"/>
                 <a:ea typeface="Noto Sans CJK KR"/>
               </a:rPr>
-              <a:t>Life Portfolio · 인생포트폴리오 커스텀 다이어리</a:t>
+              <a:t>Life Portfolio · 인생포트폴리오 맞춤형 다이어리</a:t>
             </a:r>
           </a:p>
         </p:txBody>
@@ -13823,7 +13788,7 @@
                 <a:latin typeface="Noto Sans CJK KR"/>
                 <a:ea typeface="Noto Sans CJK KR"/>
               </a:rPr>
-              <a:t>Life Portfolio · 인생포트폴리오 커스텀 다이어리</a:t>
+              <a:t>Life Portfolio · 인생포트폴리오 맞춤형 다이어리</a:t>
             </a:r>
           </a:p>
         </p:txBody>
@@ -16207,7 +16172,7 @@
                 <a:latin typeface="Noto Sans CJK KR"/>
                 <a:ea typeface="Noto Sans CJK KR"/>
               </a:rPr>
-              <a:t>Life Portfolio · 인생포트폴리오 커스텀 다이어리</a:t>
+              <a:t>Life Portfolio · 인생포트폴리오 맞춤형 다이어리</a:t>
             </a:r>
           </a:p>
         </p:txBody>
@@ -16799,7 +16764,7 @@
                 <a:latin typeface="Noto Sans CJK KR"/>
                 <a:ea typeface="Noto Sans CJK KR"/>
               </a:rPr>
-              <a:t>· 견적 요청: 70g 종이 · 232p 단일 시나리오 · 오프셋/디지털 택1</a:t>
+              <a:t>· 견적 요청: 70g 종이 · 256p · 오프셋/디지털 택1</a:t>
             </a:r>
           </a:p>
         </p:txBody>
@@ -17085,7 +17050,7 @@
                 <a:latin typeface="Noto Sans CJK KR"/>
                 <a:ea typeface="Noto Sans CJK KR"/>
               </a:rPr>
-              <a:t>Life Portfolio · 인생포트폴리오 커스텀 다이어리</a:t>
+              <a:t>Life Portfolio · 인생포트폴리오 맞춤형 다이어리</a:t>
             </a:r>
           </a:p>
         </p:txBody>
@@ -18319,7 +18284,7 @@
                 <a:latin typeface="Noto Sans CJK KR"/>
                 <a:ea typeface="Noto Sans CJK KR"/>
               </a:rPr>
-              <a:t>Life Portfolio · 인생포트폴리오 커스텀 다이어리</a:t>
+              <a:t>Life Portfolio · 인생포트폴리오 맞춤형 다이어리</a:t>
             </a:r>
           </a:p>
         </p:txBody>
@@ -18669,7 +18634,7 @@
                 <a:latin typeface="Noto Sans CJK KR"/>
                 <a:ea typeface="Noto Sans CJK KR"/>
               </a:rPr>
-              <a:t>견적 요청 항목 — 8개 (사양서 v1.1 §4 ~ §6)</a:t>
+              <a:t>견적 요청 항목 — 8개 (사양서 v1.2 §4 ~ §6)</a:t>
             </a:r>
           </a:p>
         </p:txBody>
@@ -19085,7 +19050,7 @@
                 <a:latin typeface="Noto Sans CJK KR"/>
                 <a:ea typeface="Noto Sans CJK KR"/>
               </a:rPr>
-              <a:t>232p 단일 (속표지·판권 8p 포함)</a:t>
+              <a:t>256p (속표지·판권 8p + 본문 248p)</a:t>
             </a:r>
           </a:p>
         </p:txBody>
@@ -21235,7 +21200,7 @@
                 <a:latin typeface="Noto Sans CJK KR"/>
                 <a:ea typeface="Noto Sans CJK KR"/>
               </a:rPr>
-              <a:t>Life Portfolio · 인생포트폴리오 커스텀 다이어리</a:t>
+              <a:t>Life Portfolio · 인생포트폴리오 맞춤형 다이어리</a:t>
             </a:r>
           </a:p>
         </p:txBody>
@@ -22073,7 +22038,7 @@
                 <a:latin typeface="Noto Sans CJK KR"/>
                 <a:ea typeface="Noto Sans CJK KR"/>
               </a:rPr>
-              <a:t>Part 0 ~ Part 7 · 합계 232p (단일 시나리오)</a:t>
+              <a:t>Part 0 ~ Part 7 · 합계 256p · 연간/월간/메모장 포함</a:t>
             </a:r>
           </a:p>
         </p:txBody>
@@ -22605,7 +22570,7 @@
                 <a:latin typeface="Noto Sans CJK KR"/>
                 <a:ea typeface="Noto Sans CJK KR"/>
               </a:rPr>
-              <a:t>Life Portfolio · 인생포트폴리오 커스텀 다이어리</a:t>
+              <a:t>Life Portfolio · 인생포트폴리오 맞춤형 다이어리</a:t>
             </a:r>
           </a:p>
         </p:txBody>
@@ -23164,7 +23129,7 @@
                 <a:latin typeface="Noto Sans CJK KR"/>
                 <a:ea typeface="Noto Sans CJK KR"/>
               </a:rPr>
-              <a:t>Life Portfolio · 인생포트폴리오 커스텀 다이어리</a:t>
+              <a:t>Life Portfolio · 인생포트폴리오 맞춤형 다이어리</a:t>
             </a:r>
           </a:p>
         </p:txBody>
@@ -24326,7 +24291,7 @@
                 <a:latin typeface="Noto Sans CJK KR"/>
                 <a:ea typeface="Noto Sans CJK KR"/>
               </a:rPr>
-              <a:t>Life Portfolio · 인생포트폴리오 커스텀 다이어리</a:t>
+              <a:t>Life Portfolio · 인생포트폴리오 맞춤형 다이어리</a:t>
             </a:r>
           </a:p>
         </p:txBody>
@@ -25856,7 +25821,7 @@
                 <a:latin typeface="Noto Sans CJK KR"/>
                 <a:ea typeface="Noto Sans CJK KR"/>
               </a:rPr>
-              <a:t>약 232p (단일 시나리오)</a:t>
+              <a:t>256p (16의 배수 · 16절판 최적)</a:t>
             </a:r>
           </a:p>
         </p:txBody>
@@ -25896,7 +25861,7 @@
                 <a:latin typeface="Noto Sans CJK KR"/>
                 <a:ea typeface="Noto Sans CJK KR"/>
               </a:rPr>
-              <a:t>속표지·판권 8p 포함 — 70g 단일 견적</a:t>
+              <a:t>속표지·판권 8p + 본문 248p — 70g 단일 견적</a:t>
             </a:r>
           </a:p>
         </p:txBody>
@@ -25980,7 +25945,7 @@
                 <a:latin typeface="Noto Sans CJK KR"/>
                 <a:ea typeface="Noto Sans CJK KR"/>
               </a:rPr>
-              <a:t>Life Portfolio · 인생포트폴리오 커스텀 다이어리</a:t>
+              <a:t>Life Portfolio · 인생포트폴리오 맞춤형 다이어리</a:t>
             </a:r>
           </a:p>
         </p:txBody>
@@ -27393,7 +27358,7 @@
                 <a:latin typeface="Noto Sans CJK KR"/>
                 <a:ea typeface="Noto Sans CJK KR"/>
               </a:rPr>
-              <a:t>Life Portfolio · 인생포트폴리오 커스텀 다이어리</a:t>
+              <a:t>Life Portfolio · 인생포트폴리오 맞춤형 다이어리</a:t>
             </a:r>
           </a:p>
         </p:txBody>
@@ -27743,7 +27708,7 @@
                 <a:latin typeface="Noto Sans CJK KR"/>
                 <a:ea typeface="Noto Sans CJK KR"/>
               </a:rPr>
-              <a:t>손글씨 다이어리 — 만년필·중성펜 친화 70g 단일 시나리오 (v1.1 확정)</a:t>
+              <a:t>손글씨 다이어리 — 만년필·중성펜 친화 70g 단일 시나리오 (v1.2 확정)</a:t>
             </a:r>
           </a:p>
         </p:txBody>
@@ -27964,7 +27929,7 @@
                 <a:latin typeface="Noto Sans CJK KR"/>
                 <a:ea typeface="Noto Sans CJK KR"/>
               </a:rPr>
-              <a:t>· 두께감: 얇음 — 232p 기준 책등 약 18mm</a:t>
+              <a:t>· 두께감: 적정 — 256p 기준 책등 약 20mm</a:t>
             </a:r>
           </a:p>
           <a:p>
@@ -28038,7 +28003,7 @@
                 <a:latin typeface="Noto Sans CJK KR"/>
                 <a:ea typeface="Noto Sans CJK KR"/>
               </a:rPr>
-              <a:t>선택 이유 (v1.1)</a:t>
+              <a:t>선택 이유 (v1.2)</a:t>
             </a:r>
           </a:p>
           <a:p>
@@ -28106,7 +28071,7 @@
                 <a:latin typeface="Noto Sans CJK KR"/>
                 <a:ea typeface="Noto Sans CJK KR"/>
               </a:rPr>
-              <a:t>· 232p × 70g = 휴대성 + 두께 균형 (몰스킨급)</a:t>
+              <a:t>· 256p × 70g = 휴대성 + 1년 기록 충분 (몰스킨급)</a:t>
             </a:r>
           </a:p>
           <a:p>
@@ -28207,7 +28172,7 @@
                 <a:latin typeface="Noto Sans CJK KR"/>
                 <a:ea typeface="Noto Sans CJK KR"/>
               </a:rPr>
-              <a:t>Life Portfolio · 인생포트폴리오 커스텀 다이어리</a:t>
+              <a:t>Life Portfolio · 인생포트폴리오 맞춤형 다이어리</a:t>
             </a:r>
           </a:p>
         </p:txBody>
@@ -28677,8 +28642,8 @@
                 <a:latin typeface="Noto Sans CJK KR"/>
                 <a:ea typeface="Noto Sans CJK KR"/>
               </a:rPr>
-              <a:t>· 페이지 합계 232p (단일 시나리오)
-  속표지·판권 8p 포함</a:t>
+              <a:t>· 페이지 합계 256p (16의 배수 · 16절판)
+  속표지·판권 8p + 본문 248p</a:t>
             </a:r>
           </a:p>
           <a:p>
@@ -28958,7 +28923,7 @@
         <p:spPr>
           <a:xfrm>
             <a:off x="6583680" y="2834640"/>
-            <a:ext cx="5029200" cy="365760"/>
+            <a:ext cx="5029200" cy="310896"/>
           </a:xfrm>
           <a:prstGeom prst="rect">
             <a:avLst/>
@@ -29003,8 +28968,8 @@
         </p:nvSpPr>
         <p:spPr>
           <a:xfrm>
-            <a:off x="6675120" y="2907792"/>
-            <a:ext cx="914400" cy="274320"/>
+            <a:off x="6675120" y="2880360"/>
+            <a:ext cx="914400" cy="256032"/>
           </a:xfrm>
           <a:prstGeom prst="rect">
             <a:avLst/>
@@ -29023,7 +28988,7 @@
               </a:lnSpc>
             </a:pPr>
             <a:r>
-              <a:rPr sz="1000" b="1">
+              <a:rPr sz="950" b="1">
                 <a:solidFill>
                   <a:srgbClr val="1A2B4A"/>
                 </a:solidFill>
@@ -29043,8 +29008,8 @@
         </p:nvSpPr>
         <p:spPr>
           <a:xfrm>
-            <a:off x="7680960" y="2907792"/>
-            <a:ext cx="822960" cy="274320"/>
+            <a:off x="7680960" y="2880360"/>
+            <a:ext cx="822960" cy="256032"/>
           </a:xfrm>
           <a:prstGeom prst="rect">
             <a:avLst/>
@@ -29063,14 +29028,14 @@
               </a:lnSpc>
             </a:pPr>
             <a:r>
-              <a:rPr sz="1000" b="0">
+              <a:rPr sz="950" b="0">
                 <a:solidFill>
                   <a:srgbClr val="374151"/>
                 </a:solidFill>
                 <a:latin typeface="Noto Sans CJK KR"/>
                 <a:ea typeface="Noto Sans CJK KR"/>
               </a:rPr>
-              <a:t>8p</a:t>
+              <a:t>10p</a:t>
             </a:r>
           </a:p>
         </p:txBody>
@@ -29083,8 +29048,8 @@
         </p:nvSpPr>
         <p:spPr>
           <a:xfrm>
-            <a:off x="8595360" y="2907792"/>
-            <a:ext cx="2926080" cy="274320"/>
+            <a:off x="8595360" y="2880360"/>
+            <a:ext cx="2926080" cy="256032"/>
           </a:xfrm>
           <a:prstGeom prst="rect">
             <a:avLst/>
@@ -29103,14 +29068,14 @@
               </a:lnSpc>
             </a:pPr>
             <a:r>
-              <a:rPr sz="950" b="0">
+              <a:rPr sz="900" b="0">
                 <a:solidFill>
                   <a:srgbClr val="1F2937"/>
                 </a:solidFill>
                 <a:latin typeface="Noto Sans CJK KR"/>
                 <a:ea typeface="Noto Sans CJK KR"/>
               </a:rPr>
-              <a:t>리포트 발췌 (손글씨 7항목)</a:t>
+              <a:t>리포트 발췌 (손글씨 7항목, 4SE 2p 분할)</a:t>
             </a:r>
           </a:p>
         </p:txBody>
@@ -29123,8 +29088,8 @@
         </p:nvSpPr>
         <p:spPr>
           <a:xfrm>
-            <a:off x="6583680" y="3200400"/>
-            <a:ext cx="5029200" cy="365760"/>
+            <a:off x="6583680" y="3145536"/>
+            <a:ext cx="5029200" cy="310896"/>
           </a:xfrm>
           <a:prstGeom prst="rect">
             <a:avLst/>
@@ -29169,8 +29134,8 @@
         </p:nvSpPr>
         <p:spPr>
           <a:xfrm>
-            <a:off x="6675120" y="3273552"/>
-            <a:ext cx="914400" cy="274320"/>
+            <a:off x="6675120" y="3191256"/>
+            <a:ext cx="914400" cy="256032"/>
           </a:xfrm>
           <a:prstGeom prst="rect">
             <a:avLst/>
@@ -29189,7 +29154,7 @@
               </a:lnSpc>
             </a:pPr>
             <a:r>
-              <a:rPr sz="1000" b="1">
+              <a:rPr sz="950" b="1">
                 <a:solidFill>
                   <a:srgbClr val="1A2B4A"/>
                 </a:solidFill>
@@ -29209,8 +29174,8 @@
         </p:nvSpPr>
         <p:spPr>
           <a:xfrm>
-            <a:off x="7680960" y="3273552"/>
-            <a:ext cx="822960" cy="274320"/>
+            <a:off x="7680960" y="3191256"/>
+            <a:ext cx="822960" cy="256032"/>
           </a:xfrm>
           <a:prstGeom prst="rect">
             <a:avLst/>
@@ -29229,14 +29194,14 @@
               </a:lnSpc>
             </a:pPr>
             <a:r>
-              <a:rPr sz="1000" b="0">
+              <a:rPr sz="950" b="0">
                 <a:solidFill>
                   <a:srgbClr val="374151"/>
                 </a:solidFill>
                 <a:latin typeface="Noto Sans CJK KR"/>
                 <a:ea typeface="Noto Sans CJK KR"/>
               </a:rPr>
-              <a:t>16p</a:t>
+              <a:t>12p</a:t>
             </a:r>
           </a:p>
         </p:txBody>
@@ -29249,8 +29214,8 @@
         </p:nvSpPr>
         <p:spPr>
           <a:xfrm>
-            <a:off x="8595360" y="3273552"/>
-            <a:ext cx="2926080" cy="274320"/>
+            <a:off x="8595360" y="3191256"/>
+            <a:ext cx="2926080" cy="256032"/>
           </a:xfrm>
           <a:prstGeom prst="rect">
             <a:avLst/>
@@ -29269,14 +29234,14 @@
               </a:lnSpc>
             </a:pPr>
             <a:r>
-              <a:rPr sz="950" b="0">
+              <a:rPr sz="900" b="0">
                 <a:solidFill>
                   <a:srgbClr val="1F2937"/>
                 </a:solidFill>
                 <a:latin typeface="Noto Sans CJK KR"/>
                 <a:ea typeface="Noto Sans CJK KR"/>
               </a:rPr>
-              <a:t>13영역 인생 지도</a:t>
+              <a:t>13영역 인생 지도 (압축)</a:t>
             </a:r>
           </a:p>
         </p:txBody>
@@ -29289,8 +29254,8 @@
         </p:nvSpPr>
         <p:spPr>
           <a:xfrm>
-            <a:off x="6583680" y="3566160"/>
-            <a:ext cx="5029200" cy="365760"/>
+            <a:off x="6583680" y="3456432"/>
+            <a:ext cx="5029200" cy="310896"/>
           </a:xfrm>
           <a:prstGeom prst="rect">
             <a:avLst/>
@@ -29335,8 +29300,8 @@
         </p:nvSpPr>
         <p:spPr>
           <a:xfrm>
-            <a:off x="6675120" y="3639312"/>
-            <a:ext cx="914400" cy="274320"/>
+            <a:off x="6675120" y="3502152"/>
+            <a:ext cx="914400" cy="256032"/>
           </a:xfrm>
           <a:prstGeom prst="rect">
             <a:avLst/>
@@ -29355,14 +29320,14 @@
               </a:lnSpc>
             </a:pPr>
             <a:r>
-              <a:rPr sz="1000" b="1">
+              <a:rPr sz="950" b="1">
                 <a:solidFill>
                   <a:srgbClr val="1A2B4A"/>
                 </a:solidFill>
                 <a:latin typeface="Noto Sans CJK KR"/>
                 <a:ea typeface="Noto Sans CJK KR"/>
               </a:rPr>
-              <a:t>Part 2</a:t>
+              <a:t>연간</a:t>
             </a:r>
           </a:p>
         </p:txBody>
@@ -29375,8 +29340,8 @@
         </p:nvSpPr>
         <p:spPr>
           <a:xfrm>
-            <a:off x="7680960" y="3639312"/>
-            <a:ext cx="822960" cy="274320"/>
+            <a:off x="7680960" y="3502152"/>
+            <a:ext cx="822960" cy="256032"/>
           </a:xfrm>
           <a:prstGeom prst="rect">
             <a:avLst/>
@@ -29395,14 +29360,14 @@
               </a:lnSpc>
             </a:pPr>
             <a:r>
-              <a:rPr sz="1000" b="0">
+              <a:rPr sz="950" b="0">
                 <a:solidFill>
                   <a:srgbClr val="374151"/>
                 </a:solidFill>
                 <a:latin typeface="Noto Sans CJK KR"/>
                 <a:ea typeface="Noto Sans CJK KR"/>
               </a:rPr>
-              <a:t>12p</a:t>
+              <a:t>2p</a:t>
             </a:r>
           </a:p>
         </p:txBody>
@@ -29415,8 +29380,8 @@
         </p:nvSpPr>
         <p:spPr>
           <a:xfrm>
-            <a:off x="8595360" y="3639312"/>
-            <a:ext cx="2926080" cy="274320"/>
+            <a:off x="8595360" y="3502152"/>
+            <a:ext cx="2926080" cy="256032"/>
           </a:xfrm>
           <a:prstGeom prst="rect">
             <a:avLst/>
@@ -29435,14 +29400,14 @@
               </a:lnSpc>
             </a:pPr>
             <a:r>
-              <a:rPr sz="950" b="0">
+              <a:rPr sz="900" b="0">
                 <a:solidFill>
                   <a:srgbClr val="1F2937"/>
                 </a:solidFill>
                 <a:latin typeface="Noto Sans CJK KR"/>
                 <a:ea typeface="Noto Sans CJK KR"/>
               </a:rPr>
-              <a:t>연간 비전 · 90일 마일스톤</a:t>
+              <a:t>1년 한눈에 (시장 표준)</a:t>
             </a:r>
           </a:p>
         </p:txBody>
@@ -29455,8 +29420,8 @@
         </p:nvSpPr>
         <p:spPr>
           <a:xfrm>
-            <a:off x="6583680" y="3931920"/>
-            <a:ext cx="5029200" cy="365760"/>
+            <a:off x="6583680" y="3767328"/>
+            <a:ext cx="5029200" cy="310896"/>
           </a:xfrm>
           <a:prstGeom prst="rect">
             <a:avLst/>
@@ -29501,8 +29466,8 @@
         </p:nvSpPr>
         <p:spPr>
           <a:xfrm>
-            <a:off x="6675120" y="4005072"/>
-            <a:ext cx="914400" cy="274320"/>
+            <a:off x="6675120" y="3813048"/>
+            <a:ext cx="914400" cy="256032"/>
           </a:xfrm>
           <a:prstGeom prst="rect">
             <a:avLst/>
@@ -29521,14 +29486,14 @@
               </a:lnSpc>
             </a:pPr>
             <a:r>
-              <a:rPr sz="1000" b="1">
+              <a:rPr sz="950" b="1">
                 <a:solidFill>
                   <a:srgbClr val="1A2B4A"/>
                 </a:solidFill>
                 <a:latin typeface="Noto Sans CJK KR"/>
                 <a:ea typeface="Noto Sans CJK KR"/>
               </a:rPr>
-              <a:t>Part 3</a:t>
+              <a:t>Part 2</a:t>
             </a:r>
           </a:p>
         </p:txBody>
@@ -29541,8 +29506,8 @@
         </p:nvSpPr>
         <p:spPr>
           <a:xfrm>
-            <a:off x="7680960" y="4005072"/>
-            <a:ext cx="822960" cy="274320"/>
+            <a:off x="7680960" y="3813048"/>
+            <a:ext cx="822960" cy="256032"/>
           </a:xfrm>
           <a:prstGeom prst="rect">
             <a:avLst/>
@@ -29561,14 +29526,14 @@
               </a:lnSpc>
             </a:pPr>
             <a:r>
-              <a:rPr sz="1000" b="0">
+              <a:rPr sz="950" b="0">
                 <a:solidFill>
                   <a:srgbClr val="374151"/>
                 </a:solidFill>
                 <a:latin typeface="Noto Sans CJK KR"/>
                 <a:ea typeface="Noto Sans CJK KR"/>
               </a:rPr>
-              <a:t>104p</a:t>
+              <a:t>10p</a:t>
             </a:r>
           </a:p>
         </p:txBody>
@@ -29581,8 +29546,8 @@
         </p:nvSpPr>
         <p:spPr>
           <a:xfrm>
-            <a:off x="8595360" y="4005072"/>
-            <a:ext cx="2926080" cy="274320"/>
+            <a:off x="8595360" y="3813048"/>
+            <a:ext cx="2926080" cy="256032"/>
           </a:xfrm>
           <a:prstGeom prst="rect">
             <a:avLst/>
@@ -29601,14 +29566,14 @@
               </a:lnSpc>
             </a:pPr>
             <a:r>
-              <a:rPr sz="950" b="0">
+              <a:rPr sz="900" b="0">
                 <a:solidFill>
                   <a:srgbClr val="1F2937"/>
                 </a:solidFill>
                 <a:latin typeface="Noto Sans CJK KR"/>
                 <a:ea typeface="Noto Sans CJK KR"/>
               </a:rPr>
-              <a:t>주간 펼침면 52주 × 2p</a:t>
+              <a:t>연간 비전 · 90일 마일스톤</a:t>
             </a:r>
           </a:p>
         </p:txBody>
@@ -29621,8 +29586,8 @@
         </p:nvSpPr>
         <p:spPr>
           <a:xfrm>
-            <a:off x="6583680" y="4297680"/>
-            <a:ext cx="5029200" cy="365760"/>
+            <a:off x="6583680" y="4078224"/>
+            <a:ext cx="5029200" cy="310896"/>
           </a:xfrm>
           <a:prstGeom prst="rect">
             <a:avLst/>
@@ -29667,8 +29632,8 @@
         </p:nvSpPr>
         <p:spPr>
           <a:xfrm>
-            <a:off x="6675120" y="4370832"/>
-            <a:ext cx="914400" cy="274320"/>
+            <a:off x="6675120" y="4123944"/>
+            <a:ext cx="914400" cy="256032"/>
           </a:xfrm>
           <a:prstGeom prst="rect">
             <a:avLst/>
@@ -29687,14 +29652,14 @@
               </a:lnSpc>
             </a:pPr>
             <a:r>
-              <a:rPr sz="1000" b="1">
+              <a:rPr sz="950" b="1">
                 <a:solidFill>
                   <a:srgbClr val="1A2B4A"/>
                 </a:solidFill>
                 <a:latin typeface="Noto Sans CJK KR"/>
                 <a:ea typeface="Noto Sans CJK KR"/>
               </a:rPr>
-              <a:t>Part 4</a:t>
+              <a:t>월간</a:t>
             </a:r>
           </a:p>
         </p:txBody>
@@ -29707,8 +29672,8 @@
         </p:nvSpPr>
         <p:spPr>
           <a:xfrm>
-            <a:off x="7680960" y="4370832"/>
-            <a:ext cx="822960" cy="274320"/>
+            <a:off x="7680960" y="4123944"/>
+            <a:ext cx="822960" cy="256032"/>
           </a:xfrm>
           <a:prstGeom prst="rect">
             <a:avLst/>
@@ -29727,14 +29692,14 @@
               </a:lnSpc>
             </a:pPr>
             <a:r>
-              <a:rPr sz="1000" b="0">
+              <a:rPr sz="950" b="0">
                 <a:solidFill>
                   <a:srgbClr val="374151"/>
                 </a:solidFill>
                 <a:latin typeface="Noto Sans CJK KR"/>
                 <a:ea typeface="Noto Sans CJK KR"/>
               </a:rPr>
-              <a:t>52p</a:t>
+              <a:t>24p</a:t>
             </a:r>
           </a:p>
         </p:txBody>
@@ -29747,8 +29712,8 @@
         </p:nvSpPr>
         <p:spPr>
           <a:xfrm>
-            <a:off x="8595360" y="4370832"/>
-            <a:ext cx="2926080" cy="274320"/>
+            <a:off x="8595360" y="4123944"/>
+            <a:ext cx="2926080" cy="256032"/>
           </a:xfrm>
           <a:prstGeom prst="rect">
             <a:avLst/>
@@ -29767,14 +29732,14 @@
               </a:lnSpc>
             </a:pPr>
             <a:r>
-              <a:rPr sz="950" b="0">
+              <a:rPr sz="900" b="0">
                 <a:solidFill>
                   <a:srgbClr val="1F2937"/>
                 </a:solidFill>
                 <a:latin typeface="Noto Sans CJK KR"/>
                 <a:ea typeface="Noto Sans CJK KR"/>
               </a:rPr>
-              <a:t>영역별 분기 회고 4p × 13</a:t>
+              <a:t>12개월 × 2p (시장 표준)</a:t>
             </a:r>
           </a:p>
         </p:txBody>
@@ -29787,8 +29752,8 @@
         </p:nvSpPr>
         <p:spPr>
           <a:xfrm>
-            <a:off x="6583680" y="4663440"/>
-            <a:ext cx="5029200" cy="365760"/>
+            <a:off x="6583680" y="4389120"/>
+            <a:ext cx="5029200" cy="310896"/>
           </a:xfrm>
           <a:prstGeom prst="rect">
             <a:avLst/>
@@ -29833,8 +29798,8 @@
         </p:nvSpPr>
         <p:spPr>
           <a:xfrm>
-            <a:off x="6675120" y="4736592"/>
-            <a:ext cx="914400" cy="274320"/>
+            <a:off x="6675120" y="4434840"/>
+            <a:ext cx="914400" cy="256032"/>
           </a:xfrm>
           <a:prstGeom prst="rect">
             <a:avLst/>
@@ -29853,14 +29818,14 @@
               </a:lnSpc>
             </a:pPr>
             <a:r>
-              <a:rPr sz="1000" b="1">
+              <a:rPr sz="950" b="1">
                 <a:solidFill>
                   <a:srgbClr val="1A2B4A"/>
                 </a:solidFill>
                 <a:latin typeface="Noto Sans CJK KR"/>
                 <a:ea typeface="Noto Sans CJK KR"/>
               </a:rPr>
-              <a:t>Part 5</a:t>
+              <a:t>Part 3</a:t>
             </a:r>
           </a:p>
         </p:txBody>
@@ -29873,8 +29838,8 @@
         </p:nvSpPr>
         <p:spPr>
           <a:xfrm>
-            <a:off x="7680960" y="4736592"/>
-            <a:ext cx="822960" cy="274320"/>
+            <a:off x="7680960" y="4434840"/>
+            <a:ext cx="822960" cy="256032"/>
           </a:xfrm>
           <a:prstGeom prst="rect">
             <a:avLst/>
@@ -29893,14 +29858,14 @@
               </a:lnSpc>
             </a:pPr>
             <a:r>
-              <a:rPr sz="1000" b="0">
+              <a:rPr sz="950" b="0">
                 <a:solidFill>
                   <a:srgbClr val="374151"/>
                 </a:solidFill>
                 <a:latin typeface="Noto Sans CJK KR"/>
                 <a:ea typeface="Noto Sans CJK KR"/>
               </a:rPr>
-              <a:t>12p</a:t>
+              <a:t>104p</a:t>
             </a:r>
           </a:p>
         </p:txBody>
@@ -29913,8 +29878,8 @@
         </p:nvSpPr>
         <p:spPr>
           <a:xfrm>
-            <a:off x="8595360" y="4736592"/>
-            <a:ext cx="2926080" cy="274320"/>
+            <a:off x="8595360" y="4434840"/>
+            <a:ext cx="2926080" cy="256032"/>
           </a:xfrm>
           <a:prstGeom prst="rect">
             <a:avLst/>
@@ -29933,14 +29898,14 @@
               </a:lnSpc>
             </a:pPr>
             <a:r>
-              <a:rPr sz="950" b="0">
+              <a:rPr sz="900" b="0">
                 <a:solidFill>
                   <a:srgbClr val="1F2937"/>
                 </a:solidFill>
                 <a:latin typeface="Noto Sans CJK KR"/>
                 <a:ea typeface="Noto Sans CJK KR"/>
               </a:rPr>
-              <a:t>감사 일기 (월별)</a:t>
+              <a:t>주간 펼침면 52주 × 2p (차별점)</a:t>
             </a:r>
           </a:p>
         </p:txBody>
@@ -29953,8 +29918,8 @@
         </p:nvSpPr>
         <p:spPr>
           <a:xfrm>
-            <a:off x="6583680" y="5029200"/>
-            <a:ext cx="5029200" cy="365760"/>
+            <a:off x="6583680" y="4700016"/>
+            <a:ext cx="5029200" cy="310896"/>
           </a:xfrm>
           <a:prstGeom prst="rect">
             <a:avLst/>
@@ -29999,8 +29964,8 @@
         </p:nvSpPr>
         <p:spPr>
           <a:xfrm>
-            <a:off x="6675120" y="5102352"/>
-            <a:ext cx="914400" cy="274320"/>
+            <a:off x="6675120" y="4745736"/>
+            <a:ext cx="914400" cy="256032"/>
           </a:xfrm>
           <a:prstGeom prst="rect">
             <a:avLst/>
@@ -30019,14 +29984,14 @@
               </a:lnSpc>
             </a:pPr>
             <a:r>
-              <a:rPr sz="1000" b="1">
+              <a:rPr sz="950" b="1">
                 <a:solidFill>
                   <a:srgbClr val="1A2B4A"/>
                 </a:solidFill>
                 <a:latin typeface="Noto Sans CJK KR"/>
                 <a:ea typeface="Noto Sans CJK KR"/>
               </a:rPr>
-              <a:t>Part 6</a:t>
+              <a:t>Part 4</a:t>
             </a:r>
           </a:p>
         </p:txBody>
@@ -30039,8 +30004,8 @@
         </p:nvSpPr>
         <p:spPr>
           <a:xfrm>
-            <a:off x="7680960" y="5102352"/>
-            <a:ext cx="822960" cy="274320"/>
+            <a:off x="7680960" y="4745736"/>
+            <a:ext cx="822960" cy="256032"/>
           </a:xfrm>
           <a:prstGeom prst="rect">
             <a:avLst/>
@@ -30059,14 +30024,14 @@
               </a:lnSpc>
             </a:pPr>
             <a:r>
-              <a:rPr sz="1000" b="0">
+              <a:rPr sz="950" b="0">
                 <a:solidFill>
                   <a:srgbClr val="374151"/>
                 </a:solidFill>
                 <a:latin typeface="Noto Sans CJK KR"/>
                 <a:ea typeface="Noto Sans CJK KR"/>
               </a:rPr>
-              <a:t>8p</a:t>
+              <a:t>26p</a:t>
             </a:r>
           </a:p>
         </p:txBody>
@@ -30079,8 +30044,8 @@
         </p:nvSpPr>
         <p:spPr>
           <a:xfrm>
-            <a:off x="8595360" y="5102352"/>
-            <a:ext cx="2926080" cy="274320"/>
+            <a:off x="8595360" y="4745736"/>
+            <a:ext cx="2926080" cy="256032"/>
           </a:xfrm>
           <a:prstGeom prst="rect">
             <a:avLst/>
@@ -30099,14 +30064,14 @@
               </a:lnSpc>
             </a:pPr>
             <a:r>
-              <a:rPr sz="950" b="0">
+              <a:rPr sz="900" b="0">
                 <a:solidFill>
                   <a:srgbClr val="1F2937"/>
                 </a:solidFill>
                 <a:latin typeface="Noto Sans CJK KR"/>
                 <a:ea typeface="Noto Sans CJK KR"/>
               </a:rPr>
-              <a:t>1:1 코칭 약속 · 진척 기록</a:t>
+              <a:t>영역별 분기 회고 (압축)</a:t>
             </a:r>
           </a:p>
         </p:txBody>
@@ -30119,8 +30084,8 @@
         </p:nvSpPr>
         <p:spPr>
           <a:xfrm>
-            <a:off x="6583680" y="5394960"/>
-            <a:ext cx="5029200" cy="365760"/>
+            <a:off x="6583680" y="5010912"/>
+            <a:ext cx="5029200" cy="310896"/>
           </a:xfrm>
           <a:prstGeom prst="rect">
             <a:avLst/>
@@ -30165,8 +30130,8 @@
         </p:nvSpPr>
         <p:spPr>
           <a:xfrm>
-            <a:off x="6675120" y="5468112"/>
-            <a:ext cx="914400" cy="274320"/>
+            <a:off x="6675120" y="5056632"/>
+            <a:ext cx="914400" cy="256032"/>
           </a:xfrm>
           <a:prstGeom prst="rect">
             <a:avLst/>
@@ -30185,14 +30150,14 @@
               </a:lnSpc>
             </a:pPr>
             <a:r>
-              <a:rPr sz="1000" b="1">
+              <a:rPr sz="950" b="1">
                 <a:solidFill>
                   <a:srgbClr val="1A2B4A"/>
                 </a:solidFill>
                 <a:latin typeface="Noto Sans CJK KR"/>
                 <a:ea typeface="Noto Sans CJK KR"/>
               </a:rPr>
-              <a:t>Part 7</a:t>
+              <a:t>Part 5</a:t>
             </a:r>
           </a:p>
         </p:txBody>
@@ -30205,8 +30170,8 @@
         </p:nvSpPr>
         <p:spPr>
           <a:xfrm>
-            <a:off x="7680960" y="5468112"/>
-            <a:ext cx="822960" cy="274320"/>
+            <a:off x="7680960" y="5056632"/>
+            <a:ext cx="822960" cy="256032"/>
           </a:xfrm>
           <a:prstGeom prst="rect">
             <a:avLst/>
@@ -30225,7 +30190,7 @@
               </a:lnSpc>
             </a:pPr>
             <a:r>
-              <a:rPr sz="1000" b="0">
+              <a:rPr sz="950" b="0">
                 <a:solidFill>
                   <a:srgbClr val="374151"/>
                 </a:solidFill>
@@ -30245,8 +30210,8 @@
         </p:nvSpPr>
         <p:spPr>
           <a:xfrm>
-            <a:off x="8595360" y="5468112"/>
-            <a:ext cx="2926080" cy="274320"/>
+            <a:off x="8595360" y="5056632"/>
+            <a:ext cx="2926080" cy="256032"/>
           </a:xfrm>
           <a:prstGeom prst="rect">
             <a:avLst/>
@@ -30265,14 +30230,14 @@
               </a:lnSpc>
             </a:pPr>
             <a:r>
-              <a:rPr sz="950" b="0">
+              <a:rPr sz="900" b="0">
                 <a:solidFill>
                   <a:srgbClr val="1F2937"/>
                 </a:solidFill>
                 <a:latin typeface="Noto Sans CJK KR"/>
                 <a:ea typeface="Noto Sans CJK KR"/>
               </a:rPr>
-              <a:t>부록 — 성경구절 / 명언 / 13영역</a:t>
+              <a:t>감사 일기 (월별)</a:t>
             </a:r>
           </a:p>
         </p:txBody>
@@ -30285,17 +30250,19 @@
         </p:nvSpPr>
         <p:spPr>
           <a:xfrm>
-            <a:off x="6583680" y="5760720"/>
-            <a:ext cx="5029200" cy="365760"/>
-          </a:xfrm>
-          <a:prstGeom prst="rect">
-            <a:avLst/>
-          </a:prstGeom>
-          <a:solidFill>
-            <a:srgbClr val="FEF7E6"/>
-          </a:solidFill>
-          <a:ln>
-            <a:noFill/>
+            <a:off x="6583680" y="5321808"/>
+            <a:ext cx="5029200" cy="310896"/>
+          </a:xfrm>
+          <a:prstGeom prst="rect">
+            <a:avLst/>
+          </a:prstGeom>
+          <a:solidFill>
+            <a:srgbClr val="F9FAFB"/>
+          </a:solidFill>
+          <a:ln w="5080">
+            <a:solidFill>
+              <a:srgbClr val="E5E7EB"/>
+            </a:solidFill>
           </a:ln>
           <a:effectLst/>
         </p:spPr>
@@ -30329,8 +30296,8 @@
         </p:nvSpPr>
         <p:spPr>
           <a:xfrm>
-            <a:off x="6675120" y="5833872"/>
-            <a:ext cx="914400" cy="274320"/>
+            <a:off x="6675120" y="5367528"/>
+            <a:ext cx="914400" cy="256032"/>
           </a:xfrm>
           <a:prstGeom prst="rect">
             <a:avLst/>
@@ -30349,14 +30316,14 @@
               </a:lnSpc>
             </a:pPr>
             <a:r>
-              <a:rPr sz="1000" b="1">
+              <a:rPr sz="950" b="1">
                 <a:solidFill>
                   <a:srgbClr val="1A2B4A"/>
                 </a:solidFill>
                 <a:latin typeface="Noto Sans CJK KR"/>
                 <a:ea typeface="Noto Sans CJK KR"/>
               </a:rPr>
-              <a:t>합계</a:t>
+              <a:t>Part 6</a:t>
             </a:r>
           </a:p>
         </p:txBody>
@@ -30369,8 +30336,8 @@
         </p:nvSpPr>
         <p:spPr>
           <a:xfrm>
-            <a:off x="7680960" y="5833872"/>
-            <a:ext cx="1828800" cy="274320"/>
+            <a:off x="7680960" y="5367528"/>
+            <a:ext cx="822960" cy="256032"/>
           </a:xfrm>
           <a:prstGeom prst="rect">
             <a:avLst/>
@@ -30389,14 +30356,14 @@
               </a:lnSpc>
             </a:pPr>
             <a:r>
-              <a:rPr sz="1000" b="1">
-                <a:solidFill>
-                  <a:srgbClr val="1A2B4A"/>
-                </a:solidFill>
-                <a:latin typeface="Noto Sans CJK KR"/>
-                <a:ea typeface="Noto Sans CJK KR"/>
-              </a:rPr>
-              <a:t>224p + 8p = 232p</a:t>
+              <a:rPr sz="950" b="0">
+                <a:solidFill>
+                  <a:srgbClr val="374151"/>
+                </a:solidFill>
+                <a:latin typeface="Noto Sans CJK KR"/>
+                <a:ea typeface="Noto Sans CJK KR"/>
+              </a:rPr>
+              <a:t>8p</a:t>
             </a:r>
           </a:p>
         </p:txBody>
@@ -30409,8 +30376,8 @@
         </p:nvSpPr>
         <p:spPr>
           <a:xfrm>
-            <a:off x="9601200" y="5833872"/>
-            <a:ext cx="1920240" cy="274320"/>
+            <a:off x="8595360" y="5367528"/>
+            <a:ext cx="2926080" cy="256032"/>
           </a:xfrm>
           <a:prstGeom prst="rect">
             <a:avLst/>
@@ -30429,14 +30396,14 @@
               </a:lnSpc>
             </a:pPr>
             <a:r>
-              <a:rPr sz="950" b="0">
-                <a:solidFill>
-                  <a:srgbClr val="374151"/>
-                </a:solidFill>
-                <a:latin typeface="Noto Sans CJK KR"/>
-                <a:ea typeface="Noto Sans CJK KR"/>
-              </a:rPr>
-              <a:t>속표지·판권 8p 포함</a:t>
+              <a:rPr sz="900" b="0">
+                <a:solidFill>
+                  <a:srgbClr val="1F2937"/>
+                </a:solidFill>
+                <a:latin typeface="Noto Sans CJK KR"/>
+                <a:ea typeface="Noto Sans CJK KR"/>
+              </a:rPr>
+              <a:t>1:1 코칭 약속 · 진척 기록</a:t>
             </a:r>
           </a:p>
         </p:txBody>
@@ -30449,17 +30416,19 @@
         </p:nvSpPr>
         <p:spPr>
           <a:xfrm>
-            <a:off x="548640" y="6446520"/>
-            <a:ext cx="11094415" cy="4500"/>
-          </a:xfrm>
-          <a:prstGeom prst="rect">
-            <a:avLst/>
-          </a:prstGeom>
-          <a:solidFill>
-            <a:srgbClr val="E5E7EB"/>
-          </a:solidFill>
-          <a:ln>
-            <a:noFill/>
+            <a:off x="6583680" y="5632704"/>
+            <a:ext cx="5029200" cy="310896"/>
+          </a:xfrm>
+          <a:prstGeom prst="rect">
+            <a:avLst/>
+          </a:prstGeom>
+          <a:solidFill>
+            <a:srgbClr val="FFFFFF"/>
+          </a:solidFill>
+          <a:ln w="5080">
+            <a:solidFill>
+              <a:srgbClr val="E5E7EB"/>
+            </a:solidFill>
           </a:ln>
           <a:effectLst/>
         </p:spPr>
@@ -30493,8 +30462,8 @@
         </p:nvSpPr>
         <p:spPr>
           <a:xfrm>
-            <a:off x="548640" y="6537960"/>
-            <a:ext cx="6400800" cy="274320"/>
+            <a:off x="6675120" y="5678424"/>
+            <a:ext cx="914400" cy="256032"/>
           </a:xfrm>
           <a:prstGeom prst="rect">
             <a:avLst/>
@@ -30513,6 +30482,334 @@
               </a:lnSpc>
             </a:pPr>
             <a:r>
+              <a:rPr sz="950" b="1">
+                <a:solidFill>
+                  <a:srgbClr val="1A2B4A"/>
+                </a:solidFill>
+                <a:latin typeface="Noto Sans CJK KR"/>
+                <a:ea typeface="Noto Sans CJK KR"/>
+              </a:rPr>
+              <a:t>Part 7</a:t>
+            </a:r>
+          </a:p>
+        </p:txBody>
+      </p:sp>
+      <p:sp>
+        <p:nvSpPr>
+          <p:cNvPr id="55" name="TextBox 54"/>
+          <p:cNvSpPr txBox="1"/>
+          <p:nvPr/>
+        </p:nvSpPr>
+        <p:spPr>
+          <a:xfrm>
+            <a:off x="7680960" y="5678424"/>
+            <a:ext cx="822960" cy="256032"/>
+          </a:xfrm>
+          <a:prstGeom prst="rect">
+            <a:avLst/>
+          </a:prstGeom>
+          <a:noFill/>
+        </p:spPr>
+        <p:txBody>
+          <a:bodyPr wrap="square" lIns="0" rIns="0" tIns="0" bIns="0" anchor="t">
+            <a:spAutoFit/>
+          </a:bodyPr>
+          <a:lstStyle/>
+          <a:p>
+            <a:pPr algn="l">
+              <a:lnSpc>
+                <a:spcPct val="130000"/>
+              </a:lnSpc>
+            </a:pPr>
+            <a:r>
+              <a:rPr sz="950" b="0">
+                <a:solidFill>
+                  <a:srgbClr val="374151"/>
+                </a:solidFill>
+                <a:latin typeface="Noto Sans CJK KR"/>
+                <a:ea typeface="Noto Sans CJK KR"/>
+              </a:rPr>
+              <a:t>16p</a:t>
+            </a:r>
+          </a:p>
+        </p:txBody>
+      </p:sp>
+      <p:sp>
+        <p:nvSpPr>
+          <p:cNvPr id="56" name="TextBox 55"/>
+          <p:cNvSpPr txBox="1"/>
+          <p:nvPr/>
+        </p:nvSpPr>
+        <p:spPr>
+          <a:xfrm>
+            <a:off x="8595360" y="5678424"/>
+            <a:ext cx="2926080" cy="256032"/>
+          </a:xfrm>
+          <a:prstGeom prst="rect">
+            <a:avLst/>
+          </a:prstGeom>
+          <a:noFill/>
+        </p:spPr>
+        <p:txBody>
+          <a:bodyPr wrap="square" lIns="0" rIns="0" tIns="0" bIns="0" anchor="t">
+            <a:spAutoFit/>
+          </a:bodyPr>
+          <a:lstStyle/>
+          <a:p>
+            <a:pPr algn="l">
+              <a:lnSpc>
+                <a:spcPct val="130000"/>
+              </a:lnSpc>
+            </a:pPr>
+            <a:r>
+              <a:rPr sz="900" b="0">
+                <a:solidFill>
+                  <a:srgbClr val="1F2937"/>
+                </a:solidFill>
+                <a:latin typeface="Noto Sans CJK KR"/>
+                <a:ea typeface="Noto Sans CJK KR"/>
+              </a:rPr>
+              <a:t>부록 + 자유 메모장 8p (도트)</a:t>
+            </a:r>
+          </a:p>
+        </p:txBody>
+      </p:sp>
+      <p:sp>
+        <p:nvSpPr>
+          <p:cNvPr id="57" name="Rectangle 56"/>
+          <p:cNvSpPr/>
+          <p:nvPr/>
+        </p:nvSpPr>
+        <p:spPr>
+          <a:xfrm>
+            <a:off x="6583680" y="5943600"/>
+            <a:ext cx="5029200" cy="329184"/>
+          </a:xfrm>
+          <a:prstGeom prst="rect">
+            <a:avLst/>
+          </a:prstGeom>
+          <a:solidFill>
+            <a:srgbClr val="FEF7E6"/>
+          </a:solidFill>
+          <a:ln>
+            <a:noFill/>
+          </a:ln>
+          <a:effectLst/>
+        </p:spPr>
+        <p:style>
+          <a:lnRef idx="1">
+            <a:schemeClr val="accent1"/>
+          </a:lnRef>
+          <a:fillRef idx="3">
+            <a:schemeClr val="accent1"/>
+          </a:fillRef>
+          <a:effectRef idx="2">
+            <a:schemeClr val="accent1"/>
+          </a:effectRef>
+          <a:fontRef idx="minor">
+            <a:schemeClr val="lt1"/>
+          </a:fontRef>
+        </p:style>
+        <p:txBody>
+          <a:bodyPr rtlCol="0" anchor="ctr"/>
+          <a:lstStyle/>
+          <a:p>
+            <a:pPr algn="ctr"/>
+          </a:p>
+        </p:txBody>
+      </p:sp>
+      <p:sp>
+        <p:nvSpPr>
+          <p:cNvPr id="58" name="TextBox 57"/>
+          <p:cNvSpPr txBox="1"/>
+          <p:nvPr/>
+        </p:nvSpPr>
+        <p:spPr>
+          <a:xfrm>
+            <a:off x="6675120" y="5998464"/>
+            <a:ext cx="914400" cy="256032"/>
+          </a:xfrm>
+          <a:prstGeom prst="rect">
+            <a:avLst/>
+          </a:prstGeom>
+          <a:noFill/>
+        </p:spPr>
+        <p:txBody>
+          <a:bodyPr wrap="square" lIns="0" rIns="0" tIns="0" bIns="0" anchor="t">
+            <a:spAutoFit/>
+          </a:bodyPr>
+          <a:lstStyle/>
+          <a:p>
+            <a:pPr algn="l">
+              <a:lnSpc>
+                <a:spcPct val="130000"/>
+              </a:lnSpc>
+            </a:pPr>
+            <a:r>
+              <a:rPr sz="1000" b="1">
+                <a:solidFill>
+                  <a:srgbClr val="1A2B4A"/>
+                </a:solidFill>
+                <a:latin typeface="Noto Sans CJK KR"/>
+                <a:ea typeface="Noto Sans CJK KR"/>
+              </a:rPr>
+              <a:t>합계</a:t>
+            </a:r>
+          </a:p>
+        </p:txBody>
+      </p:sp>
+      <p:sp>
+        <p:nvSpPr>
+          <p:cNvPr id="59" name="TextBox 58"/>
+          <p:cNvSpPr txBox="1"/>
+          <p:nvPr/>
+        </p:nvSpPr>
+        <p:spPr>
+          <a:xfrm>
+            <a:off x="7680960" y="5998464"/>
+            <a:ext cx="2011680" cy="256032"/>
+          </a:xfrm>
+          <a:prstGeom prst="rect">
+            <a:avLst/>
+          </a:prstGeom>
+          <a:noFill/>
+        </p:spPr>
+        <p:txBody>
+          <a:bodyPr wrap="square" lIns="0" rIns="0" tIns="0" bIns="0" anchor="t">
+            <a:spAutoFit/>
+          </a:bodyPr>
+          <a:lstStyle/>
+          <a:p>
+            <a:pPr algn="l">
+              <a:lnSpc>
+                <a:spcPct val="130000"/>
+              </a:lnSpc>
+            </a:pPr>
+            <a:r>
+              <a:rPr sz="1000" b="1">
+                <a:solidFill>
+                  <a:srgbClr val="1A2B4A"/>
+                </a:solidFill>
+                <a:latin typeface="Noto Sans CJK KR"/>
+                <a:ea typeface="Noto Sans CJK KR"/>
+              </a:rPr>
+              <a:t>248p + 8p = 256p</a:t>
+            </a:r>
+          </a:p>
+        </p:txBody>
+      </p:sp>
+      <p:sp>
+        <p:nvSpPr>
+          <p:cNvPr id="60" name="TextBox 59"/>
+          <p:cNvSpPr txBox="1"/>
+          <p:nvPr/>
+        </p:nvSpPr>
+        <p:spPr>
+          <a:xfrm>
+            <a:off x="9692640" y="5998464"/>
+            <a:ext cx="1920240" cy="256032"/>
+          </a:xfrm>
+          <a:prstGeom prst="rect">
+            <a:avLst/>
+          </a:prstGeom>
+          <a:noFill/>
+        </p:spPr>
+        <p:txBody>
+          <a:bodyPr wrap="square" lIns="0" rIns="0" tIns="0" bIns="0" anchor="t">
+            <a:spAutoFit/>
+          </a:bodyPr>
+          <a:lstStyle/>
+          <a:p>
+            <a:pPr algn="l">
+              <a:lnSpc>
+                <a:spcPct val="130000"/>
+              </a:lnSpc>
+            </a:pPr>
+            <a:r>
+              <a:rPr sz="950" b="0">
+                <a:solidFill>
+                  <a:srgbClr val="374151"/>
+                </a:solidFill>
+                <a:latin typeface="Noto Sans CJK KR"/>
+                <a:ea typeface="Noto Sans CJK KR"/>
+              </a:rPr>
+              <a:t>16의 배수 · 16절판</a:t>
+            </a:r>
+          </a:p>
+        </p:txBody>
+      </p:sp>
+      <p:sp>
+        <p:nvSpPr>
+          <p:cNvPr id="61" name="Rectangle 60"/>
+          <p:cNvSpPr/>
+          <p:nvPr/>
+        </p:nvSpPr>
+        <p:spPr>
+          <a:xfrm>
+            <a:off x="548640" y="6446520"/>
+            <a:ext cx="11094415" cy="4500"/>
+          </a:xfrm>
+          <a:prstGeom prst="rect">
+            <a:avLst/>
+          </a:prstGeom>
+          <a:solidFill>
+            <a:srgbClr val="E5E7EB"/>
+          </a:solidFill>
+          <a:ln>
+            <a:noFill/>
+          </a:ln>
+          <a:effectLst/>
+        </p:spPr>
+        <p:style>
+          <a:lnRef idx="1">
+            <a:schemeClr val="accent1"/>
+          </a:lnRef>
+          <a:fillRef idx="3">
+            <a:schemeClr val="accent1"/>
+          </a:fillRef>
+          <a:effectRef idx="2">
+            <a:schemeClr val="accent1"/>
+          </a:effectRef>
+          <a:fontRef idx="minor">
+            <a:schemeClr val="lt1"/>
+          </a:fontRef>
+        </p:style>
+        <p:txBody>
+          <a:bodyPr rtlCol="0" anchor="ctr"/>
+          <a:lstStyle/>
+          <a:p>
+            <a:pPr algn="ctr"/>
+          </a:p>
+        </p:txBody>
+      </p:sp>
+      <p:sp>
+        <p:nvSpPr>
+          <p:cNvPr id="62" name="TextBox 61"/>
+          <p:cNvSpPr txBox="1"/>
+          <p:nvPr/>
+        </p:nvSpPr>
+        <p:spPr>
+          <a:xfrm>
+            <a:off x="548640" y="6537960"/>
+            <a:ext cx="6400800" cy="274320"/>
+          </a:xfrm>
+          <a:prstGeom prst="rect">
+            <a:avLst/>
+          </a:prstGeom>
+          <a:noFill/>
+        </p:spPr>
+        <p:txBody>
+          <a:bodyPr wrap="square" lIns="0" rIns="0" tIns="0" bIns="0" anchor="t">
+            <a:spAutoFit/>
+          </a:bodyPr>
+          <a:lstStyle/>
+          <a:p>
+            <a:pPr algn="l">
+              <a:lnSpc>
+                <a:spcPct val="130000"/>
+              </a:lnSpc>
+            </a:pPr>
+            <a:r>
               <a:rPr sz="850" b="0">
                 <a:solidFill>
                   <a:srgbClr val="6B7280"/>
@@ -30520,14 +30817,14 @@
                 <a:latin typeface="Noto Sans CJK KR"/>
                 <a:ea typeface="Noto Sans CJK KR"/>
               </a:rPr>
-              <a:t>Life Portfolio · 인생포트폴리오 커스텀 다이어리</a:t>
-            </a:r>
-          </a:p>
-        </p:txBody>
-      </p:sp>
-      <p:sp>
-        <p:nvSpPr>
-          <p:cNvPr id="55" name="TextBox 54"/>
+              <a:t>Life Portfolio · 인생포트폴리오 맞춤형 다이어리</a:t>
+            </a:r>
+          </a:p>
+        </p:txBody>
+      </p:sp>
+      <p:sp>
+        <p:nvSpPr>
+          <p:cNvPr id="63" name="TextBox 62"/>
           <p:cNvSpPr txBox="1"/>
           <p:nvPr/>
         </p:nvSpPr>
@@ -30702,7 +30999,7 @@
                 <a:latin typeface="Noto Sans CJK KR"/>
                 <a:ea typeface="Noto Sans CJK KR"/>
               </a:rPr>
-              <a:t>Part 0 — 리포트 발췌 (손글씨 7항목 · 8p)</a:t>
+              <a:t>Part 0 — 리포트 발췌 (손글씨 7항목 · 10p · 4SE 2p 분할)</a:t>
             </a:r>
           </a:p>
         </p:txBody>
@@ -31881,7 +32178,7 @@
                 <a:latin typeface="Noto Sans CJK KR"/>
                 <a:ea typeface="Noto Sans CJK KR"/>
               </a:rPr>
-              <a:t>→ 사양서 PDF v1.1 §4 와 동일</a:t>
+              <a:t>→ 사양서 PDF v1.2 §4 와 동일</a:t>
             </a:r>
           </a:p>
         </p:txBody>
@@ -31965,7 +32262,7 @@
                 <a:latin typeface="Noto Sans CJK KR"/>
                 <a:ea typeface="Noto Sans CJK KR"/>
               </a:rPr>
-              <a:t>Life Portfolio · 인생포트폴리오 커스텀 다이어리</a:t>
+              <a:t>Life Portfolio · 인생포트폴리오 맞춤형 다이어리</a:t>
             </a:r>
           </a:p>
         </p:txBody>

--- a/docs/strategy/diary/manufacturer-brief/02_concept_deck.pptx
+++ b/docs/strategy/diary/manufacturer-brief/02_concept_deck.pptx
@@ -3243,19 +3243,17 @@
         </p:nvSpPr>
         <p:spPr>
           <a:xfrm>
-            <a:off x="5440680" y="1554480"/>
-            <a:ext cx="1280160" cy="1280160"/>
-          </a:xfrm>
-          <a:prstGeom prst="rect">
-            <a:avLst/>
-          </a:prstGeom>
-          <a:solidFill>
-            <a:srgbClr val="1A2B4A"/>
-          </a:solidFill>
-          <a:ln w="9525">
-            <a:solidFill>
-              <a:srgbClr val="C9A04F"/>
-            </a:solidFill>
+            <a:off x="5852160" y="2651760"/>
+            <a:ext cx="457200" cy="13716"/>
+          </a:xfrm>
+          <a:prstGeom prst="rect">
+            <a:avLst/>
+          </a:prstGeom>
+          <a:solidFill>
+            <a:srgbClr val="C9A04F"/>
+          </a:solidFill>
+          <a:ln>
+            <a:noFill/>
           </a:ln>
           <a:effectLst/>
         </p:spPr>
@@ -3289,8 +3287,8 @@
         </p:nvSpPr>
         <p:spPr>
           <a:xfrm>
-            <a:off x="5440680" y="1691640"/>
-            <a:ext cx="1280160" cy="1005840"/>
+            <a:off x="731520" y="2926080"/>
+            <a:ext cx="10515600" cy="457200"/>
           </a:xfrm>
           <a:prstGeom prst="rect">
             <a:avLst/>
@@ -3309,14 +3307,14 @@
               </a:lnSpc>
             </a:pPr>
             <a:r>
-              <a:rPr sz="5400" b="1">
+              <a:rPr sz="1800" b="1">
                 <a:solidFill>
                   <a:srgbClr val="C9A04F"/>
                 </a:solidFill>
                 <a:latin typeface="Noto Sans CJK KR"/>
                 <a:ea typeface="Noto Sans CJK KR"/>
               </a:rPr>
-              <a:t>L</a:t>
+              <a:t>LIFE · PORTFOLIO</a:t>
             </a:r>
           </a:p>
         </p:txBody>
@@ -3329,8 +3327,8 @@
         </p:nvSpPr>
         <p:spPr>
           <a:xfrm>
-            <a:off x="731520" y="3108960"/>
-            <a:ext cx="10515600" cy="457200"/>
+            <a:off x="731520" y="3611880"/>
+            <a:ext cx="10515600" cy="914400"/>
           </a:xfrm>
           <a:prstGeom prst="rect">
             <a:avLst/>
@@ -3349,46 +3347,6 @@
               </a:lnSpc>
             </a:pPr>
             <a:r>
-              <a:rPr sz="1800" b="1">
-                <a:solidFill>
-                  <a:srgbClr val="C9A04F"/>
-                </a:solidFill>
-                <a:latin typeface="Noto Sans CJK KR"/>
-                <a:ea typeface="Noto Sans CJK KR"/>
-              </a:rPr>
-              <a:t>LIFE · PORTFOLIO</a:t>
-            </a:r>
-          </a:p>
-        </p:txBody>
-      </p:sp>
-      <p:sp>
-        <p:nvSpPr>
-          <p:cNvPr id="8" name="TextBox 7"/>
-          <p:cNvSpPr txBox="1"/>
-          <p:nvPr/>
-        </p:nvSpPr>
-        <p:spPr>
-          <a:xfrm>
-            <a:off x="731520" y="3703320"/>
-            <a:ext cx="10515600" cy="914400"/>
-          </a:xfrm>
-          <a:prstGeom prst="rect">
-            <a:avLst/>
-          </a:prstGeom>
-          <a:noFill/>
-        </p:spPr>
-        <p:txBody>
-          <a:bodyPr wrap="square" lIns="0" rIns="0" tIns="0" bIns="0" anchor="t">
-            <a:spAutoFit/>
-          </a:bodyPr>
-          <a:lstStyle/>
-          <a:p>
-            <a:pPr algn="ctr">
-              <a:lnSpc>
-                <a:spcPct val="130000"/>
-              </a:lnSpc>
-            </a:pPr>
-            <a:r>
               <a:rPr sz="5400" b="1">
                 <a:solidFill>
                   <a:srgbClr val="FEF7E6"/>
@@ -3403,7 +3361,7 @@
       </p:sp>
       <p:sp>
         <p:nvSpPr>
-          <p:cNvPr id="9" name="Rectangle 8"/>
+          <p:cNvPr id="8" name="Rectangle 7"/>
           <p:cNvSpPr/>
           <p:nvPr/>
         </p:nvSpPr>
@@ -3447,7 +3405,7 @@
       </p:sp>
       <p:sp>
         <p:nvSpPr>
-          <p:cNvPr id="10" name="TextBox 9"/>
+          <p:cNvPr id="9" name="TextBox 8"/>
           <p:cNvSpPr txBox="1"/>
           <p:nvPr/>
         </p:nvSpPr>
@@ -4537,7 +4495,7 @@
                 <a:latin typeface="Noto Sans CJK KR"/>
                 <a:ea typeface="Noto Sans CJK KR"/>
               </a:rPr>
-              <a:t>v1.0 · 500부 견적 요청    |    10 / 16</a:t>
+              <a:t>v1.3 · 500부 견적 요청    |    10 / 16</a:t>
             </a:r>
           </a:p>
         </p:txBody>
@@ -12737,7 +12695,7 @@
                 <a:latin typeface="Noto Sans CJK KR"/>
                 <a:ea typeface="Noto Sans CJK KR"/>
               </a:rPr>
-              <a:t>v1.0 · 500부 견적 요청    |    11 / 16</a:t>
+              <a:t>v1.3 · 500부 견적 요청    |    11 / 16</a:t>
             </a:r>
           </a:p>
         </p:txBody>
@@ -13828,7 +13786,7 @@
                 <a:latin typeface="Noto Sans CJK KR"/>
                 <a:ea typeface="Noto Sans CJK KR"/>
               </a:rPr>
-              <a:t>v1.0 · 500부 견적 요청    |    12 / 16</a:t>
+              <a:t>v1.3 · 500부 견적 요청    |    12 / 16</a:t>
             </a:r>
           </a:p>
         </p:txBody>
@@ -16212,7 +16170,7 @@
                 <a:latin typeface="Noto Sans CJK KR"/>
                 <a:ea typeface="Noto Sans CJK KR"/>
               </a:rPr>
-              <a:t>v1.0 · 500부 견적 요청    |    13 / 16</a:t>
+              <a:t>v1.3 · 500부 견적 요청    |    13 / 16</a:t>
             </a:r>
           </a:p>
         </p:txBody>
@@ -16522,7 +16480,7 @@
                 <a:latin typeface="Noto Sans CJK KR"/>
                 <a:ea typeface="Noto Sans CJK KR"/>
               </a:rPr>
-              <a:t>다이어리 1권 = 전 페이지 동일 일반 인쇄 (속표지·판권 8p + 내지 224p). 구매자별 개인화는 사용자가 손글씨로 수행.</a:t>
+              <a:t>다이어리 1권 = 전 페이지 동일 일반 인쇄 (속표지·간지 8p + 내지 224p). 구매자별 개인화는 사용자가 손글씨로 수행.</a:t>
             </a:r>
           </a:p>
         </p:txBody>
@@ -17090,7 +17048,7 @@
                 <a:latin typeface="Noto Sans CJK KR"/>
                 <a:ea typeface="Noto Sans CJK KR"/>
               </a:rPr>
-              <a:t>v1.0 · 500부 견적 요청    |    14 / 16</a:t>
+              <a:t>v1.3 · 500부 견적 요청    |    14 / 16</a:t>
             </a:r>
           </a:p>
         </p:txBody>
@@ -18324,7 +18282,7 @@
                 <a:latin typeface="Noto Sans CJK KR"/>
                 <a:ea typeface="Noto Sans CJK KR"/>
               </a:rPr>
-              <a:t>v1.0 · 500부 견적 요청    |    15 / 16</a:t>
+              <a:t>v1.3 · 500부 견적 요청    |    15 / 16</a:t>
             </a:r>
           </a:p>
         </p:txBody>
@@ -18634,7 +18592,7 @@
                 <a:latin typeface="Noto Sans CJK KR"/>
                 <a:ea typeface="Noto Sans CJK KR"/>
               </a:rPr>
-              <a:t>견적 요청 항목 — 8개 (사양서 v1.2 §4 ~ §6)</a:t>
+              <a:t>견적 요청 항목 — 8개 (사양서 v1.3 §4 ~ §6)</a:t>
             </a:r>
           </a:p>
         </p:txBody>
@@ -19050,7 +19008,7 @@
                 <a:latin typeface="Noto Sans CJK KR"/>
                 <a:ea typeface="Noto Sans CJK KR"/>
               </a:rPr>
-              <a:t>256p (속표지·판권 8p + 본문 248p)</a:t>
+              <a:t>256p (속표지·간지 8p + 본문 248p)</a:t>
             </a:r>
           </a:p>
         </p:txBody>
@@ -21240,7 +21198,7 @@
                 <a:latin typeface="Noto Sans CJK KR"/>
                 <a:ea typeface="Noto Sans CJK KR"/>
               </a:rPr>
-              <a:t>v1.0 · 500부 견적 요청    |    16 / 16</a:t>
+              <a:t>v1.3 · 500부 견적 요청    |    16 / 16</a:t>
             </a:r>
           </a:p>
         </p:txBody>
@@ -22610,7 +22568,7 @@
                 <a:latin typeface="Noto Sans CJK KR"/>
                 <a:ea typeface="Noto Sans CJK KR"/>
               </a:rPr>
-              <a:t>v1.0 · 500부 견적 요청    |    2 / 16</a:t>
+              <a:t>v1.3 · 500부 견적 요청    |    2 / 16</a:t>
             </a:r>
           </a:p>
         </p:txBody>
@@ -23169,7 +23127,7 @@
                 <a:latin typeface="Noto Sans CJK KR"/>
                 <a:ea typeface="Noto Sans CJK KR"/>
               </a:rPr>
-              <a:t>v1.0 · 500부 견적 요청    |    3 / 16</a:t>
+              <a:t>v1.3 · 500부 견적 요청    |    3 / 16</a:t>
             </a:r>
           </a:p>
         </p:txBody>
@@ -24331,7 +24289,7 @@
                 <a:latin typeface="Noto Sans CJK KR"/>
                 <a:ea typeface="Noto Sans CJK KR"/>
               </a:rPr>
-              <a:t>v1.0 · 500부 견적 요청    |    4 / 16</a:t>
+              <a:t>v1.3 · 500부 견적 요청    |    4 / 16</a:t>
             </a:r>
           </a:p>
         </p:txBody>
@@ -25861,7 +25819,7 @@
                 <a:latin typeface="Noto Sans CJK KR"/>
                 <a:ea typeface="Noto Sans CJK KR"/>
               </a:rPr>
-              <a:t>속표지·판권 8p + 본문 248p — 70g 단일 견적</a:t>
+              <a:t>속표지·간지 8p + 본문 248p — 70g 단일 견적</a:t>
             </a:r>
           </a:p>
         </p:txBody>
@@ -25985,7 +25943,7 @@
                 <a:latin typeface="Noto Sans CJK KR"/>
                 <a:ea typeface="Noto Sans CJK KR"/>
               </a:rPr>
-              <a:t>v1.0 · 500부 견적 요청    |    5 / 16</a:t>
+              <a:t>v1.3 · 500부 견적 요청    |    5 / 16</a:t>
             </a:r>
           </a:p>
         </p:txBody>
@@ -27398,7 +27356,7 @@
                 <a:latin typeface="Noto Sans CJK KR"/>
                 <a:ea typeface="Noto Sans CJK KR"/>
               </a:rPr>
-              <a:t>v1.0 · 500부 견적 요청    |    6 / 16</a:t>
+              <a:t>v1.3 · 500부 견적 요청    |    6 / 16</a:t>
             </a:r>
           </a:p>
         </p:txBody>
@@ -27708,7 +27666,7 @@
                 <a:latin typeface="Noto Sans CJK KR"/>
                 <a:ea typeface="Noto Sans CJK KR"/>
               </a:rPr>
-              <a:t>손글씨 다이어리 — 만년필·중성펜 친화 70g 단일 시나리오 (v1.2 확정)</a:t>
+              <a:t>손글씨 다이어리 — 만년필·중성펜 친화 70g 단일 시나리오 (v1.3 확정)</a:t>
             </a:r>
           </a:p>
         </p:txBody>
@@ -28003,7 +27961,7 @@
                 <a:latin typeface="Noto Sans CJK KR"/>
                 <a:ea typeface="Noto Sans CJK KR"/>
               </a:rPr>
-              <a:t>선택 이유 (v1.2)</a:t>
+              <a:t>선택 이유 (v1.3)</a:t>
             </a:r>
           </a:p>
           <a:p>
@@ -28212,7 +28170,7 @@
                 <a:latin typeface="Noto Sans CJK KR"/>
                 <a:ea typeface="Noto Sans CJK KR"/>
               </a:rPr>
-              <a:t>v1.0 · 500부 견적 요청    |    7 / 16</a:t>
+              <a:t>v1.3 · 500부 견적 요청    |    7 / 16</a:t>
             </a:r>
           </a:p>
         </p:txBody>
@@ -28643,7 +28601,7 @@
                 <a:ea typeface="Noto Sans CJK KR"/>
               </a:rPr>
               <a:t>· 페이지 합계 256p (16의 배수 · 16절판)
-  속표지·판권 8p + 본문 248p</a:t>
+  속표지·간지 8p + 본문 248p</a:t>
             </a:r>
           </a:p>
           <a:p>
@@ -30529,7 +30487,7 @@
                 <a:latin typeface="Noto Sans CJK KR"/>
                 <a:ea typeface="Noto Sans CJK KR"/>
               </a:rPr>
-              <a:t>16p</a:t>
+              <a:t>24p</a:t>
             </a:r>
           </a:p>
         </p:txBody>
@@ -30569,7 +30527,7 @@
                 <a:latin typeface="Noto Sans CJK KR"/>
                 <a:ea typeface="Noto Sans CJK KR"/>
               </a:rPr>
-              <a:t>부록 + 자유 메모장 8p (도트)</a:t>
+              <a:t>부록 7p + Owner Profile 1p + 자유 메모장 16p (일일 대체)</a:t>
             </a:r>
           </a:p>
         </p:txBody>
@@ -30583,16 +30541,18 @@
         <p:spPr>
           <a:xfrm>
             <a:off x="6583680" y="5943600"/>
-            <a:ext cx="5029200" cy="329184"/>
-          </a:xfrm>
-          <a:prstGeom prst="rect">
-            <a:avLst/>
-          </a:prstGeom>
-          <a:solidFill>
-            <a:srgbClr val="FEF7E6"/>
-          </a:solidFill>
-          <a:ln>
-            <a:noFill/>
+            <a:ext cx="5029200" cy="310896"/>
+          </a:xfrm>
+          <a:prstGeom prst="rect">
+            <a:avLst/>
+          </a:prstGeom>
+          <a:solidFill>
+            <a:srgbClr val="F9FAFB"/>
+          </a:solidFill>
+          <a:ln w="5080">
+            <a:solidFill>
+              <a:srgbClr val="E5E7EB"/>
+            </a:solidFill>
           </a:ln>
           <a:effectLst/>
         </p:spPr>
@@ -30626,7 +30586,7 @@
         </p:nvSpPr>
         <p:spPr>
           <a:xfrm>
-            <a:off x="6675120" y="5998464"/>
+            <a:off x="6675120" y="5989320"/>
             <a:ext cx="914400" cy="256032"/>
           </a:xfrm>
           <a:prstGeom prst="rect">
@@ -30646,14 +30606,14 @@
               </a:lnSpc>
             </a:pPr>
             <a:r>
-              <a:rPr sz="1000" b="1">
+              <a:rPr sz="950" b="1">
                 <a:solidFill>
                   <a:srgbClr val="1A2B4A"/>
                 </a:solidFill>
                 <a:latin typeface="Noto Sans CJK KR"/>
                 <a:ea typeface="Noto Sans CJK KR"/>
               </a:rPr>
-              <a:t>합계</a:t>
+              <a:t>여유 간지</a:t>
             </a:r>
           </a:p>
         </p:txBody>
@@ -30666,8 +30626,8 @@
         </p:nvSpPr>
         <p:spPr>
           <a:xfrm>
-            <a:off x="7680960" y="5998464"/>
-            <a:ext cx="2011680" cy="256032"/>
+            <a:off x="7680960" y="5989320"/>
+            <a:ext cx="822960" cy="256032"/>
           </a:xfrm>
           <a:prstGeom prst="rect">
             <a:avLst/>
@@ -30686,14 +30646,14 @@
               </a:lnSpc>
             </a:pPr>
             <a:r>
-              <a:rPr sz="1000" b="1">
-                <a:solidFill>
-                  <a:srgbClr val="1A2B4A"/>
-                </a:solidFill>
-                <a:latin typeface="Noto Sans CJK KR"/>
-                <a:ea typeface="Noto Sans CJK KR"/>
-              </a:rPr>
-              <a:t>248p + 8p = 256p</a:t>
+              <a:rPr sz="950" b="0">
+                <a:solidFill>
+                  <a:srgbClr val="374151"/>
+                </a:solidFill>
+                <a:latin typeface="Noto Sans CJK KR"/>
+                <a:ea typeface="Noto Sans CJK KR"/>
+              </a:rPr>
+              <a:t>16p</a:t>
             </a:r>
           </a:p>
         </p:txBody>
@@ -30706,8 +30666,8 @@
         </p:nvSpPr>
         <p:spPr>
           <a:xfrm>
-            <a:off x="9692640" y="5998464"/>
-            <a:ext cx="1920240" cy="256032"/>
+            <a:off x="8595360" y="5989320"/>
+            <a:ext cx="2926080" cy="256032"/>
           </a:xfrm>
           <a:prstGeom prst="rect">
             <a:avLst/>
@@ -30726,14 +30686,14 @@
               </a:lnSpc>
             </a:pPr>
             <a:r>
-              <a:rPr sz="950" b="0">
-                <a:solidFill>
-                  <a:srgbClr val="374151"/>
-                </a:solidFill>
-                <a:latin typeface="Noto Sans CJK KR"/>
-                <a:ea typeface="Noto Sans CJK KR"/>
-              </a:rPr>
-              <a:t>16의 배수 · 16절판</a:t>
+              <a:rPr sz="900" b="0">
+                <a:solidFill>
+                  <a:srgbClr val="1F2937"/>
+                </a:solidFill>
+                <a:latin typeface="Noto Sans CJK KR"/>
+                <a:ea typeface="Noto Sans CJK KR"/>
+              </a:rPr>
+              <a:t>파트 간지 + 16절판 균형용</a:t>
             </a:r>
           </a:p>
         </p:txBody>
@@ -30746,14 +30706,14 @@
         </p:nvSpPr>
         <p:spPr>
           <a:xfrm>
-            <a:off x="548640" y="6446520"/>
-            <a:ext cx="11094415" cy="4500"/>
-          </a:xfrm>
-          <a:prstGeom prst="rect">
-            <a:avLst/>
-          </a:prstGeom>
-          <a:solidFill>
-            <a:srgbClr val="E5E7EB"/>
+            <a:off x="6583680" y="6254496"/>
+            <a:ext cx="5029200" cy="329184"/>
+          </a:xfrm>
+          <a:prstGeom prst="rect">
+            <a:avLst/>
+          </a:prstGeom>
+          <a:solidFill>
+            <a:srgbClr val="FEF7E6"/>
           </a:solidFill>
           <a:ln>
             <a:noFill/>
@@ -30790,8 +30750,8 @@
         </p:nvSpPr>
         <p:spPr>
           <a:xfrm>
-            <a:off x="548640" y="6537960"/>
-            <a:ext cx="6400800" cy="274320"/>
+            <a:off x="6675120" y="6309360"/>
+            <a:ext cx="914400" cy="256032"/>
           </a:xfrm>
           <a:prstGeom prst="rect">
             <a:avLst/>
@@ -30810,14 +30770,14 @@
               </a:lnSpc>
             </a:pPr>
             <a:r>
-              <a:rPr sz="850" b="0">
-                <a:solidFill>
-                  <a:srgbClr val="6B7280"/>
-                </a:solidFill>
-                <a:latin typeface="Noto Sans CJK KR"/>
-                <a:ea typeface="Noto Sans CJK KR"/>
-              </a:rPr>
-              <a:t>Life Portfolio · 인생포트폴리오 맞춤형 다이어리</a:t>
+              <a:rPr sz="1000" b="1">
+                <a:solidFill>
+                  <a:srgbClr val="1A2B4A"/>
+                </a:solidFill>
+                <a:latin typeface="Noto Sans CJK KR"/>
+                <a:ea typeface="Noto Sans CJK KR"/>
+              </a:rPr>
+              <a:t>합계</a:t>
             </a:r>
           </a:p>
         </p:txBody>
@@ -30830,8 +30790,8 @@
         </p:nvSpPr>
         <p:spPr>
           <a:xfrm>
-            <a:off x="7315200" y="6537960"/>
-            <a:ext cx="4297680" cy="274320"/>
+            <a:off x="7680960" y="6309360"/>
+            <a:ext cx="2011680" cy="256032"/>
           </a:xfrm>
           <a:prstGeom prst="rect">
             <a:avLst/>
@@ -30844,6 +30804,170 @@
           </a:bodyPr>
           <a:lstStyle/>
           <a:p>
+            <a:pPr algn="l">
+              <a:lnSpc>
+                <a:spcPct val="130000"/>
+              </a:lnSpc>
+            </a:pPr>
+            <a:r>
+              <a:rPr sz="1000" b="1">
+                <a:solidFill>
+                  <a:srgbClr val="1A2B4A"/>
+                </a:solidFill>
+                <a:latin typeface="Noto Sans CJK KR"/>
+                <a:ea typeface="Noto Sans CJK KR"/>
+              </a:rPr>
+              <a:t>240p + 16p = 256p</a:t>
+            </a:r>
+          </a:p>
+        </p:txBody>
+      </p:sp>
+      <p:sp>
+        <p:nvSpPr>
+          <p:cNvPr id="64" name="TextBox 63"/>
+          <p:cNvSpPr txBox="1"/>
+          <p:nvPr/>
+        </p:nvSpPr>
+        <p:spPr>
+          <a:xfrm>
+            <a:off x="9692640" y="6309360"/>
+            <a:ext cx="1920240" cy="256032"/>
+          </a:xfrm>
+          <a:prstGeom prst="rect">
+            <a:avLst/>
+          </a:prstGeom>
+          <a:noFill/>
+        </p:spPr>
+        <p:txBody>
+          <a:bodyPr wrap="square" lIns="0" rIns="0" tIns="0" bIns="0" anchor="t">
+            <a:spAutoFit/>
+          </a:bodyPr>
+          <a:lstStyle/>
+          <a:p>
+            <a:pPr algn="l">
+              <a:lnSpc>
+                <a:spcPct val="130000"/>
+              </a:lnSpc>
+            </a:pPr>
+            <a:r>
+              <a:rPr sz="950" b="0">
+                <a:solidFill>
+                  <a:srgbClr val="374151"/>
+                </a:solidFill>
+                <a:latin typeface="Noto Sans CJK KR"/>
+                <a:ea typeface="Noto Sans CJK KR"/>
+              </a:rPr>
+              <a:t>16의 배수 · 16절판</a:t>
+            </a:r>
+          </a:p>
+        </p:txBody>
+      </p:sp>
+      <p:sp>
+        <p:nvSpPr>
+          <p:cNvPr id="65" name="Rectangle 64"/>
+          <p:cNvSpPr/>
+          <p:nvPr/>
+        </p:nvSpPr>
+        <p:spPr>
+          <a:xfrm>
+            <a:off x="548640" y="6446520"/>
+            <a:ext cx="11094415" cy="4500"/>
+          </a:xfrm>
+          <a:prstGeom prst="rect">
+            <a:avLst/>
+          </a:prstGeom>
+          <a:solidFill>
+            <a:srgbClr val="E5E7EB"/>
+          </a:solidFill>
+          <a:ln>
+            <a:noFill/>
+          </a:ln>
+          <a:effectLst/>
+        </p:spPr>
+        <p:style>
+          <a:lnRef idx="1">
+            <a:schemeClr val="accent1"/>
+          </a:lnRef>
+          <a:fillRef idx="3">
+            <a:schemeClr val="accent1"/>
+          </a:fillRef>
+          <a:effectRef idx="2">
+            <a:schemeClr val="accent1"/>
+          </a:effectRef>
+          <a:fontRef idx="minor">
+            <a:schemeClr val="lt1"/>
+          </a:fontRef>
+        </p:style>
+        <p:txBody>
+          <a:bodyPr rtlCol="0" anchor="ctr"/>
+          <a:lstStyle/>
+          <a:p>
+            <a:pPr algn="ctr"/>
+          </a:p>
+        </p:txBody>
+      </p:sp>
+      <p:sp>
+        <p:nvSpPr>
+          <p:cNvPr id="66" name="TextBox 65"/>
+          <p:cNvSpPr txBox="1"/>
+          <p:nvPr/>
+        </p:nvSpPr>
+        <p:spPr>
+          <a:xfrm>
+            <a:off x="548640" y="6537960"/>
+            <a:ext cx="6400800" cy="274320"/>
+          </a:xfrm>
+          <a:prstGeom prst="rect">
+            <a:avLst/>
+          </a:prstGeom>
+          <a:noFill/>
+        </p:spPr>
+        <p:txBody>
+          <a:bodyPr wrap="square" lIns="0" rIns="0" tIns="0" bIns="0" anchor="t">
+            <a:spAutoFit/>
+          </a:bodyPr>
+          <a:lstStyle/>
+          <a:p>
+            <a:pPr algn="l">
+              <a:lnSpc>
+                <a:spcPct val="130000"/>
+              </a:lnSpc>
+            </a:pPr>
+            <a:r>
+              <a:rPr sz="850" b="0">
+                <a:solidFill>
+                  <a:srgbClr val="6B7280"/>
+                </a:solidFill>
+                <a:latin typeface="Noto Sans CJK KR"/>
+                <a:ea typeface="Noto Sans CJK KR"/>
+              </a:rPr>
+              <a:t>Life Portfolio · 인생포트폴리오 맞춤형 다이어리</a:t>
+            </a:r>
+          </a:p>
+        </p:txBody>
+      </p:sp>
+      <p:sp>
+        <p:nvSpPr>
+          <p:cNvPr id="67" name="TextBox 66"/>
+          <p:cNvSpPr txBox="1"/>
+          <p:nvPr/>
+        </p:nvSpPr>
+        <p:spPr>
+          <a:xfrm>
+            <a:off x="7315200" y="6537960"/>
+            <a:ext cx="4297680" cy="274320"/>
+          </a:xfrm>
+          <a:prstGeom prst="rect">
+            <a:avLst/>
+          </a:prstGeom>
+          <a:noFill/>
+        </p:spPr>
+        <p:txBody>
+          <a:bodyPr wrap="square" lIns="0" rIns="0" tIns="0" bIns="0" anchor="t">
+            <a:spAutoFit/>
+          </a:bodyPr>
+          <a:lstStyle/>
+          <a:p>
             <a:pPr algn="r">
               <a:lnSpc>
                 <a:spcPct val="130000"/>
@@ -30857,7 +30981,7 @@
                 <a:latin typeface="Noto Sans CJK KR"/>
                 <a:ea typeface="Noto Sans CJK KR"/>
               </a:rPr>
-              <a:t>v1.0 · 500부 견적 요청    |    8 / 16</a:t>
+              <a:t>v1.3 · 500부 견적 요청    |    8 / 16</a:t>
             </a:r>
           </a:p>
         </p:txBody>
@@ -30999,7 +31123,7 @@
                 <a:latin typeface="Noto Sans CJK KR"/>
                 <a:ea typeface="Noto Sans CJK KR"/>
               </a:rPr>
-              <a:t>Part 0 — 리포트 발췌 (손글씨 7항목 · 10p · 4SE 2p 분할)</a:t>
+              <a:t>Part 0 — 리포트 발췌 (손글씨 7항목 · 10p · 4SE 2p 분할 v1.3)</a:t>
             </a:r>
           </a:p>
         </p:txBody>
@@ -31535,7 +31659,7 @@
                 <a:latin typeface="Noto Sans CJK KR"/>
                 <a:ea typeface="Noto Sans CJK KR"/>
               </a:rPr>
-              <a:t>3.  4SE 응답 강도(%)</a:t>
+              <a:t>3.  4SE 응답 강도(%) 2p</a:t>
             </a:r>
           </a:p>
         </p:txBody>
@@ -31575,7 +31699,7 @@
                 <a:latin typeface="Noto Sans CJK KR"/>
                 <a:ea typeface="Noto Sans CJK KR"/>
               </a:rPr>
-              <a:t>자기이해 / 자기표현 / 자기설계 / 자기실행</a:t>
+              <a:t>Page A: 자기이해+자기표현 / Page B: 자기설계+자기실행 (v1.3)</a:t>
             </a:r>
           </a:p>
         </p:txBody>
@@ -32178,7 +32302,7 @@
                 <a:latin typeface="Noto Sans CJK KR"/>
                 <a:ea typeface="Noto Sans CJK KR"/>
               </a:rPr>
-              <a:t>→ 사양서 PDF v1.2 §4 와 동일</a:t>
+              <a:t>→ 사양서 PDF v1.3 §4 와 동일</a:t>
             </a:r>
           </a:p>
         </p:txBody>
@@ -32302,7 +32426,7 @@
                 <a:latin typeface="Noto Sans CJK KR"/>
                 <a:ea typeface="Noto Sans CJK KR"/>
               </a:rPr>
-              <a:t>v1.0 · 500부 견적 요청    |    9 / 16</a:t>
+              <a:t>v1.3 · 500부 견적 요청    |    9 / 16</a:t>
             </a:r>
           </a:p>
         </p:txBody>

--- a/docs/strategy/diary/manufacturer-brief/02_concept_deck.pptx
+++ b/docs/strategy/diary/manufacturer-brief/02_concept_deck.pptx
@@ -3118,7 +3118,7 @@
             <a:avLst/>
           </a:prstGeom>
           <a:solidFill>
-            <a:srgbClr val="1A2B4A"/>
+            <a:srgbClr val="0A3D2A"/>
           </a:solidFill>
           <a:ln>
             <a:noFill/>
@@ -3288,7 +3288,7 @@
         <p:spPr>
           <a:xfrm>
             <a:off x="731520" y="2926080"/>
-            <a:ext cx="10515600" cy="457200"/>
+            <a:ext cx="10515600" cy="548640"/>
           </a:xfrm>
           <a:prstGeom prst="rect">
             <a:avLst/>
@@ -3307,14 +3307,14 @@
               </a:lnSpc>
             </a:pPr>
             <a:r>
-              <a:rPr sz="1800" b="1">
+              <a:rPr sz="2200" b="0">
                 <a:solidFill>
                   <a:srgbClr val="C9A04F"/>
                 </a:solidFill>
-                <a:latin typeface="Noto Sans CJK KR"/>
-                <a:ea typeface="Noto Sans CJK KR"/>
-              </a:rPr>
-              <a:t>LIFE · PORTFOLIO</a:t>
+                <a:latin typeface="Cormorant Garamond"/>
+                <a:ea typeface="Noto Sans CJK KR"/>
+              </a:rPr>
+              <a:t>LIFE  PORTFOLIO</a:t>
             </a:r>
           </a:p>
         </p:txBody>
@@ -3412,7 +3412,7 @@
         <p:spPr>
           <a:xfrm>
             <a:off x="731520" y="5074920"/>
-            <a:ext cx="10515600" cy="548640"/>
+            <a:ext cx="10515600" cy="640080"/>
           </a:xfrm>
           <a:prstGeom prst="rect">
             <a:avLst/>
@@ -3431,11 +3431,11 @@
               </a:lnSpc>
             </a:pPr>
             <a:r>
-              <a:rPr sz="2600" b="0">
+              <a:rPr sz="2800" b="0" i="1">
                 <a:solidFill>
                   <a:srgbClr val="C9A04F"/>
                 </a:solidFill>
-                <a:latin typeface="Noto Sans CJK KR"/>
+                <a:latin typeface="Cormorant Garamond"/>
                 <a:ea typeface="Noto Sans CJK KR"/>
               </a:rPr>
               <a:t>Only One</a:t>
@@ -3575,7 +3575,7 @@
             <a:r>
               <a:rPr sz="2400" b="1">
                 <a:solidFill>
-                  <a:srgbClr val="1A2B4A"/>
+                  <a:srgbClr val="0A3D2A"/>
                 </a:solidFill>
                 <a:latin typeface="Noto Sans CJK KR"/>
                 <a:ea typeface="Noto Sans CJK KR"/>
@@ -3640,7 +3640,7 @@
             <a:avLst/>
           </a:prstGeom>
           <a:solidFill>
-            <a:srgbClr val="1A2B4A"/>
+            <a:srgbClr val="0A3D2A"/>
           </a:solidFill>
           <a:ln>
             <a:noFill/>
@@ -3774,7 +3774,7 @@
             <a:avLst/>
           </a:prstGeom>
           <a:solidFill>
-            <a:srgbClr val="1A2B4A"/>
+            <a:srgbClr val="0A3D2A"/>
           </a:solidFill>
           <a:ln>
             <a:noFill/>
@@ -3873,7 +3873,7 @@
             <a:r>
               <a:rPr sz="1100" b="1">
                 <a:solidFill>
-                  <a:srgbClr val="1A2B4A"/>
+                  <a:srgbClr val="0A3D2A"/>
                 </a:solidFill>
                 <a:latin typeface="Noto Sans CJK KR"/>
                 <a:ea typeface="Noto Sans CJK KR"/>
@@ -3958,7 +3958,7 @@
             <a:r>
               <a:rPr sz="1100" b="1">
                 <a:solidFill>
-                  <a:srgbClr val="1A2B4A"/>
+                  <a:srgbClr val="0A3D2A"/>
                 </a:solidFill>
                 <a:latin typeface="Noto Sans CJK KR"/>
                 <a:ea typeface="Noto Sans CJK KR"/>
@@ -4097,7 +4097,7 @@
             <a:avLst/>
           </a:prstGeom>
           <a:solidFill>
-            <a:srgbClr val="1A2B4A"/>
+            <a:srgbClr val="0A3D2A"/>
           </a:solidFill>
           <a:ln>
             <a:noFill/>
@@ -4196,7 +4196,7 @@
             <a:r>
               <a:rPr sz="1100" b="1">
                 <a:solidFill>
-                  <a:srgbClr val="1A2B4A"/>
+                  <a:srgbClr val="0A3D2A"/>
                 </a:solidFill>
                 <a:latin typeface="Noto Sans CJK KR"/>
                 <a:ea typeface="Noto Sans CJK KR"/>
@@ -4252,7 +4252,7 @@
                 <a:latin typeface="Noto Sans CJK KR"/>
                 <a:ea typeface="Noto Sans CJK KR"/>
               </a:rPr>
-              <a:t>· Hyatt 스타일 — 연간 → 분기 → 90일 분할</a:t>
+              <a:t>· 연간 → 분기 → 90일 분할 (QPR 방식)</a:t>
             </a:r>
           </a:p>
           <a:p>
@@ -4281,7 +4281,7 @@
             <a:r>
               <a:rPr sz="1100" b="1">
                 <a:solidFill>
-                  <a:srgbClr val="1A2B4A"/>
+                  <a:srgbClr val="0A3D2A"/>
                 </a:solidFill>
                 <a:latin typeface="Noto Sans CJK KR"/>
                 <a:ea typeface="Noto Sans CJK KR"/>
@@ -4495,7 +4495,7 @@
                 <a:latin typeface="Noto Sans CJK KR"/>
                 <a:ea typeface="Noto Sans CJK KR"/>
               </a:rPr>
-              <a:t>v1.4 · 500부 견적 요청    |    10 / 16</a:t>
+              <a:t>v1.4.2 · 500부 견적 요청    |    10 / 16</a:t>
             </a:r>
           </a:p>
         </p:txBody>
@@ -4632,7 +4632,7 @@
             <a:r>
               <a:rPr sz="2400" b="1">
                 <a:solidFill>
-                  <a:srgbClr val="1A2B4A"/>
+                  <a:srgbClr val="0A3D2A"/>
                 </a:solidFill>
                 <a:latin typeface="Noto Sans CJK KR"/>
                 <a:ea typeface="Noto Sans CJK KR"/>
@@ -4697,7 +4697,7 @@
             <a:avLst/>
           </a:prstGeom>
           <a:solidFill>
-            <a:srgbClr val="1A2B4A"/>
+            <a:srgbClr val="0A3D2A"/>
           </a:solidFill>
           <a:ln>
             <a:noFill/>
@@ -4805,7 +4805,7 @@
                 <a:latin typeface="Noto Sans CJK KR"/>
                 <a:ea typeface="Noto Sans CJK KR"/>
               </a:rPr>
-              <a:t>몰스킨 위클리 + 프랭클린 우선순위 하이브리드 — 좌측 계획 / 우측 메모 (자체 IP 5대 차별화 적용)</a:t>
+              <a:t>자체 5대 IP: 주간 사명 + ABC 우선순위 + 실행 의도 + 도트 메모 + 3줄 회고 — 좌측 계획 / 우측 메모</a:t>
             </a:r>
           </a:p>
         </p:txBody>
@@ -4926,7 +4926,7 @@
             <a:r>
               <a:rPr sz="1400" b="1">
                 <a:solidFill>
-                  <a:srgbClr val="1A2B4A"/>
+                  <a:srgbClr val="0A3D2A"/>
                 </a:solidFill>
                 <a:latin typeface="Noto Sans CJK KR"/>
                 <a:ea typeface="Noto Sans CJK KR"/>
@@ -4991,7 +4991,7 @@
             <a:avLst/>
           </a:prstGeom>
           <a:solidFill>
-            <a:srgbClr val="1A2B4A"/>
+            <a:srgbClr val="0A3D2A"/>
           </a:solidFill>
           <a:ln>
             <a:noFill/>
@@ -5055,7 +5055,7 @@
                 <a:latin typeface="Noto Sans CJK KR"/>
                 <a:ea typeface="Noto Sans CJK KR"/>
               </a:rPr>
-              <a:t>② A · B · C 우선순위 (프랭클린 참고)</a:t>
+              <a:t>② A · B · C 우선순위 (Must·Should·Could)</a:t>
             </a:r>
           </a:p>
         </p:txBody>
@@ -5075,7 +5075,7 @@
             <a:avLst/>
           </a:prstGeom>
           <a:solidFill>
-            <a:srgbClr val="1A2B4A"/>
+            <a:srgbClr val="0A3D2A"/>
           </a:solidFill>
           <a:ln>
             <a:noFill/>
@@ -5203,7 +5203,7 @@
             <a:avLst/>
           </a:prstGeom>
           <a:solidFill>
-            <a:srgbClr val="1A2B4A"/>
+            <a:srgbClr val="0A3D2A"/>
           </a:solidFill>
           <a:ln>
             <a:noFill/>
@@ -5331,7 +5331,7 @@
             <a:avLst/>
           </a:prstGeom>
           <a:solidFill>
-            <a:srgbClr val="1A2B4A"/>
+            <a:srgbClr val="0A3D2A"/>
           </a:solidFill>
           <a:ln>
             <a:noFill/>
@@ -5479,7 +5479,7 @@
                 <a:latin typeface="Noto Sans CJK KR"/>
                 <a:ea typeface="Noto Sans CJK KR"/>
               </a:rPr>
-              <a:t>③ If-Then 3개 (Gollwitzer 실행 의도)</a:t>
+              <a:t>③ If-Then 3개 (실행 의도 부착)</a:t>
             </a:r>
           </a:p>
         </p:txBody>
@@ -5812,7 +5812,7 @@
             <a:r>
               <a:rPr sz="1400" b="1">
                 <a:solidFill>
-                  <a:srgbClr val="1A2B4A"/>
+                  <a:srgbClr val="0A3D2A"/>
                 </a:solidFill>
                 <a:latin typeface="Noto Sans CJK KR"/>
                 <a:ea typeface="Noto Sans CJK KR"/>
@@ -12314,7 +12314,7 @@
             <a:r>
               <a:rPr sz="850" b="1">
                 <a:solidFill>
-                  <a:srgbClr val="1A2B4A"/>
+                  <a:srgbClr val="0A3D2A"/>
                 </a:solidFill>
                 <a:latin typeface="Noto Sans CJK KR"/>
                 <a:ea typeface="Noto Sans CJK KR"/>
@@ -12398,7 +12398,7 @@
             <a:r>
               <a:rPr sz="850" b="1">
                 <a:solidFill>
-                  <a:srgbClr val="1A2B4A"/>
+                  <a:srgbClr val="0A3D2A"/>
                 </a:solidFill>
                 <a:latin typeface="Noto Sans CJK KR"/>
                 <a:ea typeface="Noto Sans CJK KR"/>
@@ -12482,7 +12482,7 @@
             <a:r>
               <a:rPr sz="850" b="1">
                 <a:solidFill>
-                  <a:srgbClr val="1A2B4A"/>
+                  <a:srgbClr val="0A3D2A"/>
                 </a:solidFill>
                 <a:latin typeface="Noto Sans CJK KR"/>
                 <a:ea typeface="Noto Sans CJK KR"/>
@@ -12571,7 +12571,7 @@
                 <a:latin typeface="Noto Sans CJK KR"/>
                 <a:ea typeface="Noto Sans CJK KR"/>
               </a:rPr>
-              <a:t>자체 IP 차별화: ① 주간 사명 · ② 프랭클린 우선순위 · ③ Gollwitzer If-Then · ④ 몰스킨 서셋 · ⑤ 자체 3줄 회고</a:t>
+              <a:t>자체 IP 차별화: ① 주간 사명 · ② ABC 우선순위 · ③ If-Then 실행 의도 · ④ 7mm 도트 그리드 · ⑤ 3줄 회고</a:t>
             </a:r>
           </a:p>
         </p:txBody>
@@ -12695,7 +12695,7 @@
                 <a:latin typeface="Noto Sans CJK KR"/>
                 <a:ea typeface="Noto Sans CJK KR"/>
               </a:rPr>
-              <a:t>v1.4 · 500부 견적 요청    |    11 / 16</a:t>
+              <a:t>v1.4.2 · 500부 견적 요청    |    11 / 16</a:t>
             </a:r>
           </a:p>
         </p:txBody>
@@ -12832,7 +12832,7 @@
             <a:r>
               <a:rPr sz="2400" b="1">
                 <a:solidFill>
-                  <a:srgbClr val="1A2B4A"/>
+                  <a:srgbClr val="0A3D2A"/>
                 </a:solidFill>
                 <a:latin typeface="Noto Sans CJK KR"/>
                 <a:ea typeface="Noto Sans CJK KR"/>
@@ -12897,7 +12897,7 @@
             <a:avLst/>
           </a:prstGeom>
           <a:solidFill>
-            <a:srgbClr val="1A2B4A"/>
+            <a:srgbClr val="0A3D2A"/>
           </a:solidFill>
           <a:ln>
             <a:noFill/>
@@ -13031,7 +13031,7 @@
             <a:avLst/>
           </a:prstGeom>
           <a:solidFill>
-            <a:srgbClr val="1A2B4A"/>
+            <a:srgbClr val="0A3D2A"/>
           </a:solidFill>
           <a:ln>
             <a:noFill/>
@@ -13130,7 +13130,7 @@
             <a:r>
               <a:rPr sz="1100" b="1">
                 <a:solidFill>
-                  <a:srgbClr val="1A2B4A"/>
+                  <a:srgbClr val="0A3D2A"/>
                 </a:solidFill>
                 <a:latin typeface="Noto Sans CJK KR"/>
                 <a:ea typeface="Noto Sans CJK KR"/>
@@ -13169,7 +13169,7 @@
                 <a:latin typeface="Noto Sans CJK KR"/>
                 <a:ea typeface="Noto Sans CJK KR"/>
               </a:rPr>
-              <a:t>· Pennebaker 표현적 글쓰기 4문항 빈칸</a:t>
+              <a:t>· 표현적 글쓰기 4문항 빈칸 (자기 이해 회고 기법)</a:t>
             </a:r>
           </a:p>
           <a:p>
@@ -13215,12 +13215,12 @@
             <a:r>
               <a:rPr sz="1100" b="1">
                 <a:solidFill>
-                  <a:srgbClr val="1A2B4A"/>
-                </a:solidFill>
-                <a:latin typeface="Noto Sans CJK KR"/>
-                <a:ea typeface="Noto Sans CJK KR"/>
-              </a:rPr>
-              <a:t>Pennebaker 4문항(고정 라벨)</a:t>
+                  <a:srgbClr val="0A3D2A"/>
+                </a:solidFill>
+                <a:latin typeface="Noto Sans CJK KR"/>
+                <a:ea typeface="Noto Sans CJK KR"/>
+              </a:rPr>
+              <a:t>표현적 글쓰기 4문항 (고정 라벨)</a:t>
             </a:r>
           </a:p>
           <a:p>
@@ -13322,7 +13322,7 @@
                 <a:latin typeface="Noto Sans CJK KR"/>
                 <a:ea typeface="Noto Sans CJK KR"/>
               </a:rPr>
-              <a:t>근거: Pennebaker(1986) — Expressive Writing</a:t>
+              <a:t>근거: 표현적 글쓰기 — 사실→감정→의미→의도</a:t>
             </a:r>
           </a:p>
         </p:txBody>
@@ -13388,7 +13388,7 @@
             <a:avLst/>
           </a:prstGeom>
           <a:solidFill>
-            <a:srgbClr val="1A2B4A"/>
+            <a:srgbClr val="0A3D2A"/>
           </a:solidFill>
           <a:ln>
             <a:noFill/>
@@ -13487,7 +13487,7 @@
             <a:r>
               <a:rPr sz="1100" b="1">
                 <a:solidFill>
-                  <a:srgbClr val="1A2B4A"/>
+                  <a:srgbClr val="0A3D2A"/>
                 </a:solidFill>
                 <a:latin typeface="Noto Sans CJK KR"/>
                 <a:ea typeface="Noto Sans CJK KR"/>
@@ -13572,7 +13572,7 @@
             <a:r>
               <a:rPr sz="1100" b="1">
                 <a:solidFill>
-                  <a:srgbClr val="1A2B4A"/>
+                  <a:srgbClr val="0A3D2A"/>
                 </a:solidFill>
                 <a:latin typeface="Noto Sans CJK KR"/>
                 <a:ea typeface="Noto Sans CJK KR"/>
@@ -13786,7 +13786,7 @@
                 <a:latin typeface="Noto Sans CJK KR"/>
                 <a:ea typeface="Noto Sans CJK KR"/>
               </a:rPr>
-              <a:t>v1.4 · 500부 견적 요청    |    12 / 16</a:t>
+              <a:t>v1.4.2 · 500부 견적 요청    |    12 / 16</a:t>
             </a:r>
           </a:p>
         </p:txBody>
@@ -13923,7 +13923,7 @@
             <a:r>
               <a:rPr sz="2400" b="1">
                 <a:solidFill>
-                  <a:srgbClr val="1A2B4A"/>
+                  <a:srgbClr val="0A3D2A"/>
                 </a:solidFill>
                 <a:latin typeface="Noto Sans CJK KR"/>
                 <a:ea typeface="Noto Sans CJK KR"/>
@@ -13988,7 +13988,7 @@
             <a:avLst/>
           </a:prstGeom>
           <a:solidFill>
-            <a:srgbClr val="1A2B4A"/>
+            <a:srgbClr val="0A3D2A"/>
           </a:solidFill>
           <a:ln>
             <a:noFill/>
@@ -14122,7 +14122,7 @@
             <a:avLst/>
           </a:prstGeom>
           <a:solidFill>
-            <a:srgbClr val="1A2B4A"/>
+            <a:srgbClr val="0A3D2A"/>
           </a:solidFill>
           <a:ln>
             <a:noFill/>
@@ -14221,7 +14221,7 @@
             <a:r>
               <a:rPr sz="1050" b="1">
                 <a:solidFill>
-                  <a:srgbClr val="1A2B4A"/>
+                  <a:srgbClr val="0A3D2A"/>
                 </a:solidFill>
                 <a:latin typeface="Noto Sans CJK KR"/>
                 <a:ea typeface="Noto Sans CJK KR"/>
@@ -14246,7 +14246,7 @@
             <a:avLst/>
           </a:prstGeom>
           <a:solidFill>
-            <a:srgbClr val="1A2B4A"/>
+            <a:srgbClr val="0A3D2A"/>
           </a:solidFill>
           <a:ln>
             <a:noFill/>
@@ -14330,7 +14330,7 @@
             <a:avLst/>
           </a:prstGeom>
           <a:solidFill>
-            <a:srgbClr val="1A2B4A"/>
+            <a:srgbClr val="0A3D2A"/>
           </a:solidFill>
           <a:ln>
             <a:noFill/>
@@ -14414,7 +14414,7 @@
             <a:avLst/>
           </a:prstGeom>
           <a:solidFill>
-            <a:srgbClr val="1A2B4A"/>
+            <a:srgbClr val="0A3D2A"/>
           </a:solidFill>
           <a:ln>
             <a:noFill/>
@@ -14498,7 +14498,7 @@
             <a:avLst/>
           </a:prstGeom>
           <a:solidFill>
-            <a:srgbClr val="1A2B4A"/>
+            <a:srgbClr val="0A3D2A"/>
           </a:solidFill>
           <a:ln>
             <a:noFill/>
@@ -15706,7 +15706,7 @@
                 <a:latin typeface="Noto Sans CJK KR"/>
                 <a:ea typeface="Noto Sans CJK KR"/>
               </a:rPr>
-              <a:t>근거: Matthews(2007) Group 5 — 글로 쓴 목표 + 친구에게 약속·진척 보고 시 달성률 +78%</a:t>
+              <a:t>근거: 사회적 약속 연구 — 글로 쓴 목표 + 타인에게 진척 보고 시 달성률 +78%</a:t>
             </a:r>
           </a:p>
         </p:txBody>
@@ -15772,7 +15772,7 @@
             <a:avLst/>
           </a:prstGeom>
           <a:solidFill>
-            <a:srgbClr val="1A2B4A"/>
+            <a:srgbClr val="0A3D2A"/>
           </a:solidFill>
           <a:ln>
             <a:noFill/>
@@ -15871,7 +15871,7 @@
             <a:r>
               <a:rPr sz="1100" b="1">
                 <a:solidFill>
-                  <a:srgbClr val="1A2B4A"/>
+                  <a:srgbClr val="0A3D2A"/>
                 </a:solidFill>
                 <a:latin typeface="Noto Sans CJK KR"/>
                 <a:ea typeface="Noto Sans CJK KR"/>
@@ -15973,7 +15973,7 @@
             <a:r>
               <a:rPr sz="1100" b="1">
                 <a:solidFill>
-                  <a:srgbClr val="1A2B4A"/>
+                  <a:srgbClr val="0A3D2A"/>
                 </a:solidFill>
                 <a:latin typeface="Noto Sans CJK KR"/>
                 <a:ea typeface="Noto Sans CJK KR"/>
@@ -16170,7 +16170,7 @@
                 <a:latin typeface="Noto Sans CJK KR"/>
                 <a:ea typeface="Noto Sans CJK KR"/>
               </a:rPr>
-              <a:t>v1.4 · 500부 견적 요청    |    13 / 16</a:t>
+              <a:t>v1.4.2 · 500부 견적 요청    |    13 / 16</a:t>
             </a:r>
           </a:p>
         </p:txBody>
@@ -16307,7 +16307,7 @@
             <a:r>
               <a:rPr sz="2400" b="1">
                 <a:solidFill>
-                  <a:srgbClr val="1A2B4A"/>
+                  <a:srgbClr val="0A3D2A"/>
                 </a:solidFill>
                 <a:latin typeface="Noto Sans CJK KR"/>
                 <a:ea typeface="Noto Sans CJK KR"/>
@@ -16372,7 +16372,7 @@
             <a:avLst/>
           </a:prstGeom>
           <a:solidFill>
-            <a:srgbClr val="1A2B4A"/>
+            <a:srgbClr val="0A3D2A"/>
           </a:solidFill>
           <a:ln>
             <a:noFill/>
@@ -16544,7 +16544,7 @@
             <a:avLst/>
           </a:prstGeom>
           <a:solidFill>
-            <a:srgbClr val="1A2B4A"/>
+            <a:srgbClr val="0A3D2A"/>
           </a:solidFill>
           <a:ln>
             <a:noFill/>
@@ -16603,7 +16603,7 @@
             <a:r>
               <a:rPr sz="1000" b="1">
                 <a:solidFill>
-                  <a:srgbClr val="1A2B4A"/>
+                  <a:srgbClr val="0A3D2A"/>
                 </a:solidFill>
                 <a:latin typeface="Noto Sans CJK KR"/>
                 <a:ea typeface="Noto Sans CJK KR"/>
@@ -16643,7 +16643,7 @@
             <a:r>
               <a:rPr sz="1600" b="1">
                 <a:solidFill>
-                  <a:srgbClr val="1A2B4A"/>
+                  <a:srgbClr val="0A3D2A"/>
                 </a:solidFill>
                 <a:latin typeface="Noto Sans CJK KR"/>
                 <a:ea typeface="Noto Sans CJK KR"/>
@@ -16717,7 +16717,7 @@
             <a:r>
               <a:rPr sz="1050" b="1">
                 <a:solidFill>
-                  <a:srgbClr val="1A2B4A"/>
+                  <a:srgbClr val="0A3D2A"/>
                 </a:solidFill>
                 <a:latin typeface="Noto Sans CJK KR"/>
                 <a:ea typeface="Noto Sans CJK KR"/>
@@ -16845,7 +16845,7 @@
             <a:r>
               <a:rPr sz="1400" b="1">
                 <a:solidFill>
-                  <a:srgbClr val="1A2B4A"/>
+                  <a:srgbClr val="0A3D2A"/>
                 </a:solidFill>
                 <a:latin typeface="Noto Sans CJK KR"/>
                 <a:ea typeface="Noto Sans CJK KR"/>
@@ -16919,12 +16919,12 @@
             <a:r>
               <a:rPr sz="1000" b="1">
                 <a:solidFill>
-                  <a:srgbClr val="1A2B4A"/>
-                </a:solidFill>
-                <a:latin typeface="Noto Sans CJK KR"/>
-                <a:ea typeface="Noto Sans CJK KR"/>
-              </a:rPr>
-              <a:t>· 근거: Mueller &amp; Oppenheimer(2014) — 손글씨 → 개념 이해·장기 기억 우위 / Smoker(2009) — 손글씨 루틴 → 자기 관련 정보 처리 강화</a:t>
+                  <a:srgbClr val="0A3D2A"/>
+                </a:solidFill>
+                <a:latin typeface="Noto Sans CJK KR"/>
+                <a:ea typeface="Noto Sans CJK KR"/>
+              </a:rPr>
+              <a:t>· 근거: 인지심리학 연구 — 손글씨가 키보드 입력보다 개념 이해·장기 기억 + 자기 관련 정보 처리에 유리</a:t>
             </a:r>
           </a:p>
         </p:txBody>
@@ -17048,7 +17048,7 @@
                 <a:latin typeface="Noto Sans CJK KR"/>
                 <a:ea typeface="Noto Sans CJK KR"/>
               </a:rPr>
-              <a:t>v1.4 · 500부 견적 요청    |    14 / 16</a:t>
+              <a:t>v1.4.2 · 500부 견적 요청    |    14 / 16</a:t>
             </a:r>
           </a:p>
         </p:txBody>
@@ -17185,7 +17185,7 @@
             <a:r>
               <a:rPr sz="2400" b="1">
                 <a:solidFill>
-                  <a:srgbClr val="1A2B4A"/>
+                  <a:srgbClr val="0A3D2A"/>
                 </a:solidFill>
                 <a:latin typeface="Noto Sans CJK KR"/>
                 <a:ea typeface="Noto Sans CJK KR"/>
@@ -17250,7 +17250,7 @@
             <a:avLst/>
           </a:prstGeom>
           <a:solidFill>
-            <a:srgbClr val="1A2B4A"/>
+            <a:srgbClr val="0A3D2A"/>
           </a:solidFill>
           <a:ln>
             <a:noFill/>
@@ -17483,7 +17483,7 @@
             <a:r>
               <a:rPr sz="1800" b="1">
                 <a:solidFill>
-                  <a:srgbClr val="1A2B4A"/>
+                  <a:srgbClr val="0A3D2A"/>
                 </a:solidFill>
                 <a:latin typeface="Noto Sans CJK KR"/>
                 <a:ea typeface="Noto Sans CJK KR"/>
@@ -17693,7 +17693,7 @@
             <a:r>
               <a:rPr sz="1800" b="1">
                 <a:solidFill>
-                  <a:srgbClr val="1A2B4A"/>
+                  <a:srgbClr val="0A3D2A"/>
                 </a:solidFill>
                 <a:latin typeface="Noto Sans CJK KR"/>
                 <a:ea typeface="Noto Sans CJK KR"/>
@@ -17903,7 +17903,7 @@
             <a:r>
               <a:rPr sz="1800" b="1">
                 <a:solidFill>
-                  <a:srgbClr val="1A2B4A"/>
+                  <a:srgbClr val="0A3D2A"/>
                 </a:solidFill>
                 <a:latin typeface="Noto Sans CJK KR"/>
                 <a:ea typeface="Noto Sans CJK KR"/>
@@ -18113,7 +18113,7 @@
             <a:r>
               <a:rPr sz="1800" b="1">
                 <a:solidFill>
-                  <a:srgbClr val="1A2B4A"/>
+                  <a:srgbClr val="0A3D2A"/>
                 </a:solidFill>
                 <a:latin typeface="Noto Sans CJK KR"/>
                 <a:ea typeface="Noto Sans CJK KR"/>
@@ -18282,7 +18282,7 @@
                 <a:latin typeface="Noto Sans CJK KR"/>
                 <a:ea typeface="Noto Sans CJK KR"/>
               </a:rPr>
-              <a:t>v1.4 · 500부 견적 요청    |    15 / 16</a:t>
+              <a:t>v1.4.2 · 500부 견적 요청    |    15 / 16</a:t>
             </a:r>
           </a:p>
         </p:txBody>
@@ -18419,7 +18419,7 @@
             <a:r>
               <a:rPr sz="2400" b="1">
                 <a:solidFill>
-                  <a:srgbClr val="1A2B4A"/>
+                  <a:srgbClr val="0A3D2A"/>
                 </a:solidFill>
                 <a:latin typeface="Noto Sans CJK KR"/>
                 <a:ea typeface="Noto Sans CJK KR"/>
@@ -18484,7 +18484,7 @@
             <a:avLst/>
           </a:prstGeom>
           <a:solidFill>
-            <a:srgbClr val="1A2B4A"/>
+            <a:srgbClr val="0A3D2A"/>
           </a:solidFill>
           <a:ln>
             <a:noFill/>
@@ -18587,7 +18587,7 @@
             <a:r>
               <a:rPr sz="1200" b="1">
                 <a:solidFill>
-                  <a:srgbClr val="1A2B4A"/>
+                  <a:srgbClr val="0A3D2A"/>
                 </a:solidFill>
                 <a:latin typeface="Noto Sans CJK KR"/>
                 <a:ea typeface="Noto Sans CJK KR"/>
@@ -18656,7 +18656,7 @@
             <a:avLst/>
           </a:prstGeom>
           <a:solidFill>
-            <a:srgbClr val="1A2B4A"/>
+            <a:srgbClr val="0A3D2A"/>
           </a:solidFill>
           <a:ln>
             <a:noFill/>
@@ -18780,7 +18780,7 @@
             <a:avLst/>
           </a:prstGeom>
           <a:solidFill>
-            <a:srgbClr val="1A2B4A"/>
+            <a:srgbClr val="0A3D2A"/>
           </a:solidFill>
           <a:ln>
             <a:noFill/>
@@ -18904,7 +18904,7 @@
             <a:avLst/>
           </a:prstGeom>
           <a:solidFill>
-            <a:srgbClr val="1A2B4A"/>
+            <a:srgbClr val="0A3D2A"/>
           </a:solidFill>
           <a:ln>
             <a:noFill/>
@@ -19028,7 +19028,7 @@
             <a:avLst/>
           </a:prstGeom>
           <a:solidFill>
-            <a:srgbClr val="1A2B4A"/>
+            <a:srgbClr val="0A3D2A"/>
           </a:solidFill>
           <a:ln>
             <a:noFill/>
@@ -19152,7 +19152,7 @@
             <a:avLst/>
           </a:prstGeom>
           <a:solidFill>
-            <a:srgbClr val="1A2B4A"/>
+            <a:srgbClr val="0A3D2A"/>
           </a:solidFill>
           <a:ln>
             <a:noFill/>
@@ -19276,7 +19276,7 @@
             <a:avLst/>
           </a:prstGeom>
           <a:solidFill>
-            <a:srgbClr val="1A2B4A"/>
+            <a:srgbClr val="0A3D2A"/>
           </a:solidFill>
           <a:ln>
             <a:noFill/>
@@ -19400,7 +19400,7 @@
             <a:avLst/>
           </a:prstGeom>
           <a:solidFill>
-            <a:srgbClr val="1A2B4A"/>
+            <a:srgbClr val="0A3D2A"/>
           </a:solidFill>
           <a:ln>
             <a:noFill/>
@@ -19539,7 +19539,7 @@
             <a:r>
               <a:rPr sz="1200" b="1">
                 <a:solidFill>
-                  <a:srgbClr val="1A2B4A"/>
+                  <a:srgbClr val="0A3D2A"/>
                 </a:solidFill>
                 <a:latin typeface="Noto Sans CJK KR"/>
                 <a:ea typeface="Noto Sans CJK KR"/>
@@ -19608,7 +19608,7 @@
             <a:avLst/>
           </a:prstGeom>
           <a:solidFill>
-            <a:srgbClr val="1A2B4A"/>
+            <a:srgbClr val="0A3D2A"/>
           </a:solidFill>
           <a:ln w="5080">
             <a:solidFill>
@@ -19694,7 +19694,7 @@
             <a:avLst/>
           </a:prstGeom>
           <a:solidFill>
-            <a:srgbClr val="1A2B4A"/>
+            <a:srgbClr val="0A3D2A"/>
           </a:solidFill>
           <a:ln w="5080">
             <a:solidFill>
@@ -19780,7 +19780,7 @@
             <a:avLst/>
           </a:prstGeom>
           <a:solidFill>
-            <a:srgbClr val="1A2B4A"/>
+            <a:srgbClr val="0A3D2A"/>
           </a:solidFill>
           <a:ln w="5080">
             <a:solidFill>
@@ -21001,7 +21001,7 @@
             <a:r>
               <a:rPr sz="1100" b="1">
                 <a:solidFill>
-                  <a:srgbClr val="1A2B4A"/>
+                  <a:srgbClr val="0A3D2A"/>
                 </a:solidFill>
                 <a:latin typeface="Noto Sans CJK KR"/>
                 <a:ea typeface="Noto Sans CJK KR"/>
@@ -21069,7 +21069,7 @@
             <a:r>
               <a:rPr sz="1050" b="1">
                 <a:solidFill>
-                  <a:srgbClr val="1A2B4A"/>
+                  <a:srgbClr val="0A3D2A"/>
                 </a:solidFill>
                 <a:latin typeface="Noto Sans CJK KR"/>
                 <a:ea typeface="Noto Sans CJK KR"/>
@@ -21198,7 +21198,7 @@
                 <a:latin typeface="Noto Sans CJK KR"/>
                 <a:ea typeface="Noto Sans CJK KR"/>
               </a:rPr>
-              <a:t>v1.4 · 500부 견적 요청    |    16 / 16</a:t>
+              <a:t>v1.4.2 · 500부 견적 요청    |    16 / 16</a:t>
             </a:r>
           </a:p>
         </p:txBody>
@@ -21335,7 +21335,7 @@
             <a:r>
               <a:rPr sz="2400" b="1">
                 <a:solidFill>
-                  <a:srgbClr val="1A2B4A"/>
+                  <a:srgbClr val="0A3D2A"/>
                 </a:solidFill>
                 <a:latin typeface="Noto Sans CJK KR"/>
                 <a:ea typeface="Noto Sans CJK KR"/>
@@ -21400,7 +21400,7 @@
             <a:avLst/>
           </a:prstGeom>
           <a:solidFill>
-            <a:srgbClr val="1A2B4A"/>
+            <a:srgbClr val="0A3D2A"/>
           </a:solidFill>
           <a:ln>
             <a:noFill/>
@@ -21543,7 +21543,7 @@
             <a:r>
               <a:rPr sz="1800" b="1">
                 <a:solidFill>
-                  <a:srgbClr val="1A2B4A"/>
+                  <a:srgbClr val="0A3D2A"/>
                 </a:solidFill>
                 <a:latin typeface="Noto Sans CJK KR"/>
                 <a:ea typeface="Noto Sans CJK KR"/>
@@ -21747,7 +21747,7 @@
             <a:r>
               <a:rPr sz="1800" b="1">
                 <a:solidFill>
-                  <a:srgbClr val="1A2B4A"/>
+                  <a:srgbClr val="0A3D2A"/>
                 </a:solidFill>
                 <a:latin typeface="Noto Sans CJK KR"/>
                 <a:ea typeface="Noto Sans CJK KR"/>
@@ -21951,7 +21951,7 @@
             <a:r>
               <a:rPr sz="1800" b="1">
                 <a:solidFill>
-                  <a:srgbClr val="1A2B4A"/>
+                  <a:srgbClr val="0A3D2A"/>
                 </a:solidFill>
                 <a:latin typeface="Noto Sans CJK KR"/>
                 <a:ea typeface="Noto Sans CJK KR"/>
@@ -22155,7 +22155,7 @@
             <a:r>
               <a:rPr sz="1800" b="1">
                 <a:solidFill>
-                  <a:srgbClr val="1A2B4A"/>
+                  <a:srgbClr val="0A3D2A"/>
                 </a:solidFill>
                 <a:latin typeface="Noto Sans CJK KR"/>
                 <a:ea typeface="Noto Sans CJK KR"/>
@@ -22359,7 +22359,7 @@
             <a:r>
               <a:rPr sz="1800" b="1">
                 <a:solidFill>
-                  <a:srgbClr val="1A2B4A"/>
+                  <a:srgbClr val="0A3D2A"/>
                 </a:solidFill>
                 <a:latin typeface="Noto Sans CJK KR"/>
                 <a:ea typeface="Noto Sans CJK KR"/>
@@ -22568,7 +22568,7 @@
                 <a:latin typeface="Noto Sans CJK KR"/>
                 <a:ea typeface="Noto Sans CJK KR"/>
               </a:rPr>
-              <a:t>v1.4 · 500부 견적 요청    |    2 / 16</a:t>
+              <a:t>v1.4.2 · 500부 견적 요청    |    2 / 16</a:t>
             </a:r>
           </a:p>
         </p:txBody>
@@ -22705,7 +22705,7 @@
             <a:r>
               <a:rPr sz="2400" b="1">
                 <a:solidFill>
-                  <a:srgbClr val="1A2B4A"/>
+                  <a:srgbClr val="0A3D2A"/>
                 </a:solidFill>
                 <a:latin typeface="Noto Sans CJK KR"/>
                 <a:ea typeface="Noto Sans CJK KR"/>
@@ -22770,7 +22770,7 @@
             <a:avLst/>
           </a:prstGeom>
           <a:solidFill>
-            <a:srgbClr val="1A2B4A"/>
+            <a:srgbClr val="0A3D2A"/>
           </a:solidFill>
           <a:ln>
             <a:noFill/>
@@ -22913,7 +22913,7 @@
             <a:r>
               <a:rPr sz="3200" b="1">
                 <a:solidFill>
-                  <a:srgbClr val="1A2B4A"/>
+                  <a:srgbClr val="0A3D2A"/>
                 </a:solidFill>
                 <a:latin typeface="Noto Sans CJK KR"/>
                 <a:ea typeface="Noto Sans CJK KR"/>
@@ -23127,7 +23127,7 @@
                 <a:latin typeface="Noto Sans CJK KR"/>
                 <a:ea typeface="Noto Sans CJK KR"/>
               </a:rPr>
-              <a:t>v1.4 · 500부 견적 요청    |    3 / 16</a:t>
+              <a:t>v1.4.2 · 500부 견적 요청    |    3 / 16</a:t>
             </a:r>
           </a:p>
         </p:txBody>
@@ -23264,7 +23264,7 @@
             <a:r>
               <a:rPr sz="2400" b="1">
                 <a:solidFill>
-                  <a:srgbClr val="1A2B4A"/>
+                  <a:srgbClr val="0A3D2A"/>
                 </a:solidFill>
                 <a:latin typeface="Noto Sans CJK KR"/>
                 <a:ea typeface="Noto Sans CJK KR"/>
@@ -23329,7 +23329,7 @@
             <a:avLst/>
           </a:prstGeom>
           <a:solidFill>
-            <a:srgbClr val="1A2B4A"/>
+            <a:srgbClr val="0A3D2A"/>
           </a:solidFill>
           <a:ln>
             <a:noFill/>
@@ -23432,7 +23432,7 @@
             <a:r>
               <a:rPr sz="1400" b="1">
                 <a:solidFill>
-                  <a:srgbClr val="1A2B4A"/>
+                  <a:srgbClr val="0A3D2A"/>
                 </a:solidFill>
                 <a:latin typeface="Noto Sans CJK KR"/>
                 <a:ea typeface="Noto Sans CJK KR"/>
@@ -23521,7 +23521,7 @@
                 <a:latin typeface="Noto Sans CJK KR"/>
                 <a:ea typeface="Noto Sans CJK KR"/>
               </a:rPr>
-              <a:t>· 30 ~ 50대 자기설계 의지자</a:t>
+              <a:t>· 10대 후반 ~ 50대 자기설계 의지자</a:t>
             </a:r>
           </a:p>
           <a:p>
@@ -23538,7 +23538,7 @@
                 <a:latin typeface="Noto Sans CJK KR"/>
                 <a:ea typeface="Noto Sans CJK KR"/>
               </a:rPr>
-              <a:t>· 검사·진단 도구를 일상에 통합하려는 직장인 / 사업자</a:t>
+              <a:t>· 학생·성인·준비생·직장인·프리랜서·사업자 전 직군</a:t>
             </a:r>
           </a:p>
           <a:p>
@@ -23624,7 +23624,7 @@
             <a:r>
               <a:rPr sz="1400" b="1">
                 <a:solidFill>
-                  <a:srgbClr val="1A2B4A"/>
+                  <a:srgbClr val="0A3D2A"/>
                 </a:solidFill>
                 <a:latin typeface="Noto Sans CJK KR"/>
                 <a:ea typeface="Noto Sans CJK KR"/>
@@ -23693,7 +23693,7 @@
             <a:avLst/>
           </a:prstGeom>
           <a:solidFill>
-            <a:srgbClr val="1A2B4A"/>
+            <a:srgbClr val="0A3D2A"/>
           </a:solidFill>
           <a:ln>
             <a:noFill/>
@@ -23792,7 +23792,7 @@
             <a:r>
               <a:rPr sz="1300" b="1">
                 <a:solidFill>
-                  <a:srgbClr val="1A2B4A"/>
+                  <a:srgbClr val="0A3D2A"/>
                 </a:solidFill>
                 <a:latin typeface="Noto Sans CJK KR"/>
                 <a:ea typeface="Noto Sans CJK KR"/>
@@ -23857,7 +23857,7 @@
             <a:avLst/>
           </a:prstGeom>
           <a:solidFill>
-            <a:srgbClr val="1A2B4A"/>
+            <a:srgbClr val="0A3D2A"/>
           </a:solidFill>
           <a:ln>
             <a:noFill/>
@@ -23956,7 +23956,7 @@
             <a:r>
               <a:rPr sz="1300" b="1">
                 <a:solidFill>
-                  <a:srgbClr val="1A2B4A"/>
+                  <a:srgbClr val="0A3D2A"/>
                 </a:solidFill>
                 <a:latin typeface="Noto Sans CJK KR"/>
                 <a:ea typeface="Noto Sans CJK KR"/>
@@ -24021,7 +24021,7 @@
             <a:avLst/>
           </a:prstGeom>
           <a:solidFill>
-            <a:srgbClr val="1A2B4A"/>
+            <a:srgbClr val="0A3D2A"/>
           </a:solidFill>
           <a:ln>
             <a:noFill/>
@@ -24120,7 +24120,7 @@
             <a:r>
               <a:rPr sz="1300" b="1">
                 <a:solidFill>
-                  <a:srgbClr val="1A2B4A"/>
+                  <a:srgbClr val="0A3D2A"/>
                 </a:solidFill>
                 <a:latin typeface="Noto Sans CJK KR"/>
                 <a:ea typeface="Noto Sans CJK KR"/>
@@ -24289,7 +24289,7 @@
                 <a:latin typeface="Noto Sans CJK KR"/>
                 <a:ea typeface="Noto Sans CJK KR"/>
               </a:rPr>
-              <a:t>v1.4 · 500부 견적 요청    |    4 / 16</a:t>
+              <a:t>v1.4.2 · 500부 견적 요청    |    4 / 16</a:t>
             </a:r>
           </a:p>
         </p:txBody>
@@ -24426,7 +24426,7 @@
             <a:r>
               <a:rPr sz="2400" b="1">
                 <a:solidFill>
-                  <a:srgbClr val="1A2B4A"/>
+                  <a:srgbClr val="0A3D2A"/>
                 </a:solidFill>
                 <a:latin typeface="Noto Sans CJK KR"/>
                 <a:ea typeface="Noto Sans CJK KR"/>
@@ -24491,7 +24491,7 @@
             <a:avLst/>
           </a:prstGeom>
           <a:solidFill>
-            <a:srgbClr val="1A2B4A"/>
+            <a:srgbClr val="0A3D2A"/>
           </a:solidFill>
           <a:ln>
             <a:noFill/>
@@ -24724,7 +24724,7 @@
             <a:r>
               <a:rPr sz="1400" b="1">
                 <a:solidFill>
-                  <a:srgbClr val="1A2B4A"/>
+                  <a:srgbClr val="0A3D2A"/>
                 </a:solidFill>
                 <a:latin typeface="Noto Sans CJK KR"/>
                 <a:ea typeface="Noto Sans CJK KR"/>
@@ -24769,7 +24769,7 @@
                 <a:latin typeface="Noto Sans CJK KR"/>
                 <a:ea typeface="Noto Sans CJK KR"/>
               </a:rPr>
-              <a:t>몰스킨 위클리 라지와 동일 폭</a:t>
+              <a:t>시장 표준 A5 위클리 사이즈</a:t>
             </a:r>
           </a:p>
         </p:txBody>
@@ -24934,12 +24934,12 @@
             <a:r>
               <a:rPr sz="1400" b="1">
                 <a:solidFill>
-                  <a:srgbClr val="1A2B4A"/>
-                </a:solidFill>
-                <a:latin typeface="Noto Sans CJK KR"/>
-                <a:ea typeface="Noto Sans CJK KR"/>
-              </a:rPr>
-              <a:t>PU 양장 + 금박 박표지</a:t>
+                  <a:srgbClr val="0A3D2A"/>
+                </a:solidFill>
+                <a:latin typeface="Noto Sans CJK KR"/>
+                <a:ea typeface="Noto Sans CJK KR"/>
+              </a:rPr>
+              <a:t>PU 양장 (BRG) + 금박 박표지</a:t>
             </a:r>
           </a:p>
         </p:txBody>
@@ -24979,7 +24979,7 @@
                 <a:latin typeface="Noto Sans CJK KR"/>
                 <a:ea typeface="Noto Sans CJK KR"/>
               </a:rPr>
-              <a:t>형압 인생포트폴리오 로고</a:t>
+              <a:t>텍스트 박표지만 (형압 없음)</a:t>
             </a:r>
           </a:p>
         </p:txBody>
@@ -25144,7 +25144,7 @@
             <a:r>
               <a:rPr sz="1400" b="1">
                 <a:solidFill>
-                  <a:srgbClr val="1A2B4A"/>
+                  <a:srgbClr val="0A3D2A"/>
                 </a:solidFill>
                 <a:latin typeface="Noto Sans CJK KR"/>
                 <a:ea typeface="Noto Sans CJK KR"/>
@@ -25354,7 +25354,7 @@
             <a:r>
               <a:rPr sz="1400" b="1">
                 <a:solidFill>
-                  <a:srgbClr val="1A2B4A"/>
+                  <a:srgbClr val="0A3D2A"/>
                 </a:solidFill>
                 <a:latin typeface="Noto Sans CJK KR"/>
                 <a:ea typeface="Noto Sans CJK KR"/>
@@ -25564,7 +25564,7 @@
             <a:r>
               <a:rPr sz="1400" b="1">
                 <a:solidFill>
-                  <a:srgbClr val="1A2B4A"/>
+                  <a:srgbClr val="0A3D2A"/>
                 </a:solidFill>
                 <a:latin typeface="Noto Sans CJK KR"/>
                 <a:ea typeface="Noto Sans CJK KR"/>
@@ -25774,7 +25774,7 @@
             <a:r>
               <a:rPr sz="1400" b="1">
                 <a:solidFill>
-                  <a:srgbClr val="1A2B4A"/>
+                  <a:srgbClr val="0A3D2A"/>
                 </a:solidFill>
                 <a:latin typeface="Noto Sans CJK KR"/>
                 <a:ea typeface="Noto Sans CJK KR"/>
@@ -25943,7 +25943,7 @@
                 <a:latin typeface="Noto Sans CJK KR"/>
                 <a:ea typeface="Noto Sans CJK KR"/>
               </a:rPr>
-              <a:t>v1.4 · 500부 견적 요청    |    5 / 16</a:t>
+              <a:t>v1.4.2 · 500부 견적 요청    |    5 / 16</a:t>
             </a:r>
           </a:p>
         </p:txBody>
@@ -26080,7 +26080,7 @@
             <a:r>
               <a:rPr sz="2400" b="1">
                 <a:solidFill>
-                  <a:srgbClr val="1A2B4A"/>
+                  <a:srgbClr val="0A3D2A"/>
                 </a:solidFill>
                 <a:latin typeface="Noto Sans CJK KR"/>
                 <a:ea typeface="Noto Sans CJK KR"/>
@@ -26145,7 +26145,7 @@
             <a:avLst/>
           </a:prstGeom>
           <a:solidFill>
-            <a:srgbClr val="1A2B4A"/>
+            <a:srgbClr val="0A3D2A"/>
           </a:solidFill>
           <a:ln>
             <a:noFill/>
@@ -26233,7 +26233,7 @@
             <a:avLst/>
           </a:prstGeom>
           <a:solidFill>
-            <a:srgbClr val="1A2B4A"/>
+            <a:srgbClr val="0A3D2A"/>
           </a:solidFill>
           <a:ln>
             <a:noFill/>
@@ -26343,7 +26343,7 @@
                 <a:latin typeface="Noto Sans CJK KR"/>
                 <a:ea typeface="Noto Sans CJK KR"/>
               </a:rPr>
-              <a:t>CLASSIC NAVY</a:t>
+              <a:t>BRITISH RACING GREEN</a:t>
             </a:r>
           </a:p>
         </p:txBody>
@@ -26378,12 +26378,12 @@
             <a:r>
               <a:rPr sz="1500" b="1">
                 <a:solidFill>
-                  <a:srgbClr val="1A2B4A"/>
-                </a:solidFill>
-                <a:latin typeface="Noto Sans CJK KR"/>
-                <a:ea typeface="Noto Sans CJK KR"/>
-              </a:rPr>
-              <a:t>클래식 네이비</a:t>
+                  <a:srgbClr val="0A3D2A"/>
+                </a:solidFill>
+                <a:latin typeface="Noto Sans CJK KR"/>
+                <a:ea typeface="Noto Sans CJK KR"/>
+              </a:rPr>
+              <a:t>BRG 그린</a:t>
             </a:r>
           </a:p>
         </p:txBody>
@@ -26423,7 +26423,7 @@
                 <a:latin typeface="Noto Sans CJK KR"/>
                 <a:ea typeface="Noto Sans CJK KR"/>
               </a:rPr>
-              <a:t>기본 컬러</a:t>
+              <a:t>기본 컬러 (v1.4.2 ★)</a:t>
             </a:r>
           </a:p>
         </p:txBody>
@@ -26588,7 +26588,7 @@
             <a:r>
               <a:rPr sz="1500" b="1">
                 <a:solidFill>
-                  <a:srgbClr val="1A2B4A"/>
+                  <a:srgbClr val="0A3D2A"/>
                 </a:solidFill>
                 <a:latin typeface="Noto Sans CJK KR"/>
                 <a:ea typeface="Noto Sans CJK KR"/>
@@ -26653,7 +26653,7 @@
             <a:avLst/>
           </a:prstGeom>
           <a:solidFill>
-            <a:srgbClr val="1F3F32"/>
+            <a:srgbClr val="2C2C2C"/>
           </a:solidFill>
           <a:ln>
             <a:noFill/>
@@ -26763,7 +26763,7 @@
                 <a:latin typeface="Noto Sans CJK KR"/>
                 <a:ea typeface="Noto Sans CJK KR"/>
               </a:rPr>
-              <a:t>FOREST GREEN</a:t>
+              <a:t>DARK GRAY</a:t>
             </a:r>
           </a:p>
         </p:txBody>
@@ -26798,12 +26798,12 @@
             <a:r>
               <a:rPr sz="1500" b="1">
                 <a:solidFill>
-                  <a:srgbClr val="1A2B4A"/>
-                </a:solidFill>
-                <a:latin typeface="Noto Sans CJK KR"/>
-                <a:ea typeface="Noto Sans CJK KR"/>
-              </a:rPr>
-              <a:t>그린</a:t>
+                  <a:srgbClr val="0A3D2A"/>
+                </a:solidFill>
+                <a:latin typeface="Noto Sans CJK KR"/>
+                <a:ea typeface="Noto Sans CJK KR"/>
+              </a:rPr>
+              <a:t>다크 그레이</a:t>
             </a:r>
           </a:p>
         </p:txBody>
@@ -27008,7 +27008,7 @@
             <a:r>
               <a:rPr sz="1500" b="1">
                 <a:solidFill>
-                  <a:srgbClr val="1A2B4A"/>
+                  <a:srgbClr val="0A3D2A"/>
                 </a:solidFill>
                 <a:latin typeface="Noto Sans CJK KR"/>
                 <a:ea typeface="Noto Sans CJK KR"/>
@@ -27198,7 +27198,7 @@
                 <a:latin typeface="Noto Sans CJK KR"/>
                 <a:ea typeface="Noto Sans CJK KR"/>
               </a:rPr>
-              <a:t>· 표지 본체: PU 양장 (제조사 추천 자재 1종 + 대안 1종 제시 요청)</a:t>
+              <a:t>· 표지 본체: PU 양장 (British Racing Green #0A3D2A, Pantone 357 C)</a:t>
             </a:r>
           </a:p>
           <a:p>
@@ -27215,7 +27215,7 @@
                 <a:latin typeface="Noto Sans CJK KR"/>
                 <a:ea typeface="Noto Sans CJK KR"/>
               </a:rPr>
-              <a:t>· 박표지: 골드 박(#C9A04F 톤) + 형압(blind emboss) 인생포트폴리오 로고</a:t>
+              <a:t>· 박표지: 골드 박(#C9A04F 톤) — LIFE PORTFOLIO / 인생포트폴리오 / Only One 텍스트만</a:t>
             </a:r>
           </a:p>
           <a:p>
@@ -27356,7 +27356,7 @@
                 <a:latin typeface="Noto Sans CJK KR"/>
                 <a:ea typeface="Noto Sans CJK KR"/>
               </a:rPr>
-              <a:t>v1.4 · 500부 견적 요청    |    6 / 16</a:t>
+              <a:t>v1.4.2 · 500부 견적 요청    |    6 / 16</a:t>
             </a:r>
           </a:p>
         </p:txBody>
@@ -27493,7 +27493,7 @@
             <a:r>
               <a:rPr sz="2400" b="1">
                 <a:solidFill>
-                  <a:srgbClr val="1A2B4A"/>
+                  <a:srgbClr val="0A3D2A"/>
                 </a:solidFill>
                 <a:latin typeface="Noto Sans CJK KR"/>
                 <a:ea typeface="Noto Sans CJK KR"/>
@@ -27558,7 +27558,7 @@
             <a:avLst/>
           </a:prstGeom>
           <a:solidFill>
-            <a:srgbClr val="1A2B4A"/>
+            <a:srgbClr val="0A3D2A"/>
           </a:solidFill>
           <a:ln>
             <a:noFill/>
@@ -27791,7 +27791,7 @@
             <a:r>
               <a:rPr sz="1600" b="1">
                 <a:solidFill>
-                  <a:srgbClr val="1A2B4A"/>
+                  <a:srgbClr val="0A3D2A"/>
                 </a:solidFill>
                 <a:latin typeface="Noto Sans CJK KR"/>
                 <a:ea typeface="Noto Sans CJK KR"/>
@@ -28029,7 +28029,7 @@
                 <a:latin typeface="Noto Sans CJK KR"/>
                 <a:ea typeface="Noto Sans CJK KR"/>
               </a:rPr>
-              <a:t>· 256p × 70g = 휴대성 + 1년 기록 충분 (몰스킨급)</a:t>
+              <a:t>· 256p × 70g = 휴대성 + 1년 기록 충분 (시판 다이어리 평균 수준)</a:t>
             </a:r>
           </a:p>
           <a:p>
@@ -28041,7 +28041,7 @@
             <a:r>
               <a:rPr sz="1100" b="1">
                 <a:solidFill>
-                  <a:srgbClr val="1A2B4A"/>
+                  <a:srgbClr val="0A3D2A"/>
                 </a:solidFill>
                 <a:latin typeface="Noto Sans CJK KR"/>
                 <a:ea typeface="Noto Sans CJK KR"/>
@@ -28170,7 +28170,7 @@
                 <a:latin typeface="Noto Sans CJK KR"/>
                 <a:ea typeface="Noto Sans CJK KR"/>
               </a:rPr>
-              <a:t>v1.4 · 500부 견적 요청    |    7 / 16</a:t>
+              <a:t>v1.4.2 · 500부 견적 요청    |    7 / 16</a:t>
             </a:r>
           </a:p>
         </p:txBody>
@@ -28307,7 +28307,7 @@
             <a:r>
               <a:rPr sz="2400" b="1">
                 <a:solidFill>
-                  <a:srgbClr val="1A2B4A"/>
+                  <a:srgbClr val="0A3D2A"/>
                 </a:solidFill>
                 <a:latin typeface="Noto Sans CJK KR"/>
                 <a:ea typeface="Noto Sans CJK KR"/>
@@ -28372,7 +28372,7 @@
             <a:avLst/>
           </a:prstGeom>
           <a:solidFill>
-            <a:srgbClr val="1A2B4A"/>
+            <a:srgbClr val="0A3D2A"/>
           </a:solidFill>
           <a:ln>
             <a:noFill/>
@@ -28475,7 +28475,7 @@
             <a:r>
               <a:rPr sz="1200" b="1">
                 <a:solidFill>
-                  <a:srgbClr val="1A2B4A"/>
+                  <a:srgbClr val="0A3D2A"/>
                 </a:solidFill>
                 <a:latin typeface="Noto Sans CJK KR"/>
                 <a:ea typeface="Noto Sans CJK KR"/>
@@ -28613,7 +28613,7 @@
             <a:r>
               <a:rPr sz="1100" b="1">
                 <a:solidFill>
-                  <a:srgbClr val="1A2B4A"/>
+                  <a:srgbClr val="0A3D2A"/>
                 </a:solidFill>
                 <a:latin typeface="Noto Sans CJK KR"/>
                 <a:ea typeface="Noto Sans CJK KR"/>
@@ -28654,7 +28654,7 @@
             <a:r>
               <a:rPr sz="1200" b="1">
                 <a:solidFill>
-                  <a:srgbClr val="1A2B4A"/>
+                  <a:srgbClr val="0A3D2A"/>
                 </a:solidFill>
                 <a:latin typeface="Noto Sans CJK KR"/>
                 <a:ea typeface="Noto Sans CJK KR"/>
@@ -28723,7 +28723,7 @@
             <a:avLst/>
           </a:prstGeom>
           <a:solidFill>
-            <a:srgbClr val="1A2B4A"/>
+            <a:srgbClr val="0A3D2A"/>
           </a:solidFill>
           <a:ln>
             <a:noFill/>
@@ -28948,7 +28948,7 @@
             <a:r>
               <a:rPr sz="950" b="1">
                 <a:solidFill>
-                  <a:srgbClr val="1A2B4A"/>
+                  <a:srgbClr val="0A3D2A"/>
                 </a:solidFill>
                 <a:latin typeface="Noto Sans CJK KR"/>
                 <a:ea typeface="Noto Sans CJK KR"/>
@@ -29114,7 +29114,7 @@
             <a:r>
               <a:rPr sz="950" b="1">
                 <a:solidFill>
-                  <a:srgbClr val="1A2B4A"/>
+                  <a:srgbClr val="0A3D2A"/>
                 </a:solidFill>
                 <a:latin typeface="Noto Sans CJK KR"/>
                 <a:ea typeface="Noto Sans CJK KR"/>
@@ -29280,7 +29280,7 @@
             <a:r>
               <a:rPr sz="950" b="1">
                 <a:solidFill>
-                  <a:srgbClr val="1A2B4A"/>
+                  <a:srgbClr val="0A3D2A"/>
                 </a:solidFill>
                 <a:latin typeface="Noto Sans CJK KR"/>
                 <a:ea typeface="Noto Sans CJK KR"/>
@@ -29446,7 +29446,7 @@
             <a:r>
               <a:rPr sz="950" b="1">
                 <a:solidFill>
-                  <a:srgbClr val="1A2B4A"/>
+                  <a:srgbClr val="0A3D2A"/>
                 </a:solidFill>
                 <a:latin typeface="Noto Sans CJK KR"/>
                 <a:ea typeface="Noto Sans CJK KR"/>
@@ -29612,7 +29612,7 @@
             <a:r>
               <a:rPr sz="950" b="1">
                 <a:solidFill>
-                  <a:srgbClr val="1A2B4A"/>
+                  <a:srgbClr val="0A3D2A"/>
                 </a:solidFill>
                 <a:latin typeface="Noto Sans CJK KR"/>
                 <a:ea typeface="Noto Sans CJK KR"/>
@@ -29778,7 +29778,7 @@
             <a:r>
               <a:rPr sz="950" b="1">
                 <a:solidFill>
-                  <a:srgbClr val="1A2B4A"/>
+                  <a:srgbClr val="0A3D2A"/>
                 </a:solidFill>
                 <a:latin typeface="Noto Sans CJK KR"/>
                 <a:ea typeface="Noto Sans CJK KR"/>
@@ -29944,7 +29944,7 @@
             <a:r>
               <a:rPr sz="950" b="1">
                 <a:solidFill>
-                  <a:srgbClr val="1A2B4A"/>
+                  <a:srgbClr val="0A3D2A"/>
                 </a:solidFill>
                 <a:latin typeface="Noto Sans CJK KR"/>
                 <a:ea typeface="Noto Sans CJK KR"/>
@@ -30110,7 +30110,7 @@
             <a:r>
               <a:rPr sz="950" b="1">
                 <a:solidFill>
-                  <a:srgbClr val="1A2B4A"/>
+                  <a:srgbClr val="0A3D2A"/>
                 </a:solidFill>
                 <a:latin typeface="Noto Sans CJK KR"/>
                 <a:ea typeface="Noto Sans CJK KR"/>
@@ -30276,7 +30276,7 @@
             <a:r>
               <a:rPr sz="950" b="1">
                 <a:solidFill>
-                  <a:srgbClr val="1A2B4A"/>
+                  <a:srgbClr val="0A3D2A"/>
                 </a:solidFill>
                 <a:latin typeface="Noto Sans CJK KR"/>
                 <a:ea typeface="Noto Sans CJK KR"/>
@@ -30442,7 +30442,7 @@
             <a:r>
               <a:rPr sz="950" b="1">
                 <a:solidFill>
-                  <a:srgbClr val="1A2B4A"/>
+                  <a:srgbClr val="0A3D2A"/>
                 </a:solidFill>
                 <a:latin typeface="Noto Sans CJK KR"/>
                 <a:ea typeface="Noto Sans CJK KR"/>
@@ -30608,7 +30608,7 @@
             <a:r>
               <a:rPr sz="950" b="1">
                 <a:solidFill>
-                  <a:srgbClr val="1A2B4A"/>
+                  <a:srgbClr val="0A3D2A"/>
                 </a:solidFill>
                 <a:latin typeface="Noto Sans CJK KR"/>
                 <a:ea typeface="Noto Sans CJK KR"/>
@@ -30772,7 +30772,7 @@
             <a:r>
               <a:rPr sz="1000" b="1">
                 <a:solidFill>
-                  <a:srgbClr val="1A2B4A"/>
+                  <a:srgbClr val="0A3D2A"/>
                 </a:solidFill>
                 <a:latin typeface="Noto Sans CJK KR"/>
                 <a:ea typeface="Noto Sans CJK KR"/>
@@ -30812,7 +30812,7 @@
             <a:r>
               <a:rPr sz="1000" b="1">
                 <a:solidFill>
-                  <a:srgbClr val="1A2B4A"/>
+                  <a:srgbClr val="0A3D2A"/>
                 </a:solidFill>
                 <a:latin typeface="Noto Sans CJK KR"/>
                 <a:ea typeface="Noto Sans CJK KR"/>
@@ -30981,7 +30981,7 @@
                 <a:latin typeface="Noto Sans CJK KR"/>
                 <a:ea typeface="Noto Sans CJK KR"/>
               </a:rPr>
-              <a:t>v1.4 · 500부 견적 요청    |    8 / 16</a:t>
+              <a:t>v1.4.2 · 500부 견적 요청    |    8 / 16</a:t>
             </a:r>
           </a:p>
         </p:txBody>
@@ -31118,7 +31118,7 @@
             <a:r>
               <a:rPr sz="2400" b="1">
                 <a:solidFill>
-                  <a:srgbClr val="1A2B4A"/>
+                  <a:srgbClr val="0A3D2A"/>
                 </a:solidFill>
                 <a:latin typeface="Noto Sans CJK KR"/>
                 <a:ea typeface="Noto Sans CJK KR"/>
@@ -31183,7 +31183,7 @@
             <a:avLst/>
           </a:prstGeom>
           <a:solidFill>
-            <a:srgbClr val="1A2B4A"/>
+            <a:srgbClr val="0A3D2A"/>
           </a:solidFill>
           <a:ln>
             <a:noFill/>
@@ -31375,7 +31375,7 @@
                 <a:latin typeface="Noto Sans CJK KR"/>
                 <a:ea typeface="Noto Sans CJK KR"/>
               </a:rPr>
-              <a:t>사용자가 리포트 결과를 손으로 자기 다이어리에 옮겨 적는 의식 — 자기 관련 기억 +α (Mueller &amp; Oppenheimer, 2014)</a:t>
+              <a:t>사용자가 리포트 결과를 손으로 자기 다이어리에 옮겨 적는 의식 — 자기 관련 기억 강화 (인지심리학 연구)</a:t>
             </a:r>
           </a:p>
         </p:txBody>
@@ -31410,7 +31410,7 @@
             <a:r>
               <a:rPr sz="1200" b="1">
                 <a:solidFill>
-                  <a:srgbClr val="1A2B4A"/>
+                  <a:srgbClr val="0A3D2A"/>
                 </a:solidFill>
                 <a:latin typeface="Noto Sans CJK KR"/>
                 <a:ea typeface="Noto Sans CJK KR"/>
@@ -32144,7 +32144,7 @@
             <a:r>
               <a:rPr sz="1200" b="1">
                 <a:solidFill>
-                  <a:srgbClr val="1A2B4A"/>
+                  <a:srgbClr val="0A3D2A"/>
                 </a:solidFill>
                 <a:latin typeface="Noto Sans CJK KR"/>
                 <a:ea typeface="Noto Sans CJK KR"/>
@@ -32426,7 +32426,7 @@
                 <a:latin typeface="Noto Sans CJK KR"/>
                 <a:ea typeface="Noto Sans CJK KR"/>
               </a:rPr>
-              <a:t>v1.4 · 500부 견적 요청    |    9 / 16</a:t>
+              <a:t>v1.4.2 · 500부 견적 요청    |    9 / 16</a:t>
             </a:r>
           </a:p>
         </p:txBody>
